--- a/final_project.pptx
+++ b/final_project.pptx
@@ -5,16 +5,21 @@
     <p:sldMasterId id="2147483660" r:id="rId1"/>
   </p:sldMasterIdLst>
   <p:notesMasterIdLst>
-    <p:notesMasterId r:id="rId9"/>
+    <p:notesMasterId r:id="rId14"/>
   </p:notesMasterIdLst>
   <p:sldIdLst>
     <p:sldId id="340" r:id="rId2"/>
     <p:sldId id="341" r:id="rId3"/>
     <p:sldId id="345" r:id="rId4"/>
     <p:sldId id="346" r:id="rId5"/>
-    <p:sldId id="342" r:id="rId6"/>
-    <p:sldId id="343" r:id="rId7"/>
-    <p:sldId id="344" r:id="rId8"/>
+    <p:sldId id="347" r:id="rId6"/>
+    <p:sldId id="348" r:id="rId7"/>
+    <p:sldId id="349" r:id="rId8"/>
+    <p:sldId id="350" r:id="rId9"/>
+    <p:sldId id="342" r:id="rId10"/>
+    <p:sldId id="351" r:id="rId11"/>
+    <p:sldId id="343" r:id="rId12"/>
+    <p:sldId id="344" r:id="rId13"/>
   </p:sldIdLst>
   <p:sldSz cx="12192000" cy="6858000"/>
   <p:notesSz cx="6858000" cy="9144000"/>
@@ -126,11 +131,16 @@
             <p14:sldId id="341"/>
             <p14:sldId id="345"/>
             <p14:sldId id="346"/>
+            <p14:sldId id="347"/>
+            <p14:sldId id="348"/>
+            <p14:sldId id="349"/>
+            <p14:sldId id="350"/>
           </p14:sldIdLst>
         </p14:section>
         <p14:section name="Analysis result" id="{F065CAC7-3672-4C18-9A8D-950D4C15C4BE}">
           <p14:sldIdLst>
             <p14:sldId id="342"/>
+            <p14:sldId id="351"/>
           </p14:sldIdLst>
         </p14:section>
         <p14:section name="Conclusion" id="{94188AF6-D323-41AA-A526-39247F4BF3BF}">
@@ -3057,6 +3067,591 @@
 </p:sld>
 </file>
 
+<file path=ppt/slides/slide10.xml><?xml version="1.0" encoding="utf-8"?>
+<p:sld xmlns:a="http://schemas.openxmlformats.org/drawingml/2006/main" xmlns:r="http://schemas.openxmlformats.org/officeDocument/2006/relationships" xmlns:p="http://schemas.openxmlformats.org/presentationml/2006/main">
+  <p:cSld>
+    <p:spTree>
+      <p:nvGrpSpPr>
+        <p:cNvPr id="1" name=""/>
+        <p:cNvGrpSpPr/>
+        <p:nvPr/>
+      </p:nvGrpSpPr>
+      <p:grpSpPr>
+        <a:xfrm>
+          <a:off x="0" y="0"/>
+          <a:ext cx="0" cy="0"/>
+          <a:chOff x="0" y="0"/>
+          <a:chExt cx="0" cy="0"/>
+        </a:xfrm>
+      </p:grpSpPr>
+      <p:sp>
+        <p:nvSpPr>
+          <p:cNvPr id="2" name="슬라이드 번호 개체 틀 1">
+            <a:extLst>
+              <a:ext uri="{FF2B5EF4-FFF2-40B4-BE49-F238E27FC236}">
+                <a16:creationId xmlns:a16="http://schemas.microsoft.com/office/drawing/2014/main" id="{94A9F002-84B2-5C52-F476-B84E2AF3C41B}"/>
+              </a:ext>
+            </a:extLst>
+          </p:cNvPr>
+          <p:cNvSpPr>
+            <a:spLocks noGrp="1"/>
+          </p:cNvSpPr>
+          <p:nvPr>
+            <p:ph type="sldNum" sz="quarter" idx="12"/>
+          </p:nvPr>
+        </p:nvSpPr>
+        <p:spPr/>
+        <p:txBody>
+          <a:bodyPr/>
+          <a:lstStyle/>
+          <a:p>
+            <a:fld id="{03396D25-9861-42CC-B82C-BA5CD8B5B13B}" type="slidenum">
+              <a:rPr lang="ko-KR" altLang="en-US" smtClean="0"/>
+              <a:pPr/>
+              <a:t>10</a:t>
+            </a:fld>
+            <a:endParaRPr lang="ko-KR" altLang="en-US"/>
+          </a:p>
+        </p:txBody>
+      </p:sp>
+      <p:sp>
+        <p:nvSpPr>
+          <p:cNvPr id="3" name="제목 2">
+            <a:extLst>
+              <a:ext uri="{FF2B5EF4-FFF2-40B4-BE49-F238E27FC236}">
+                <a16:creationId xmlns:a16="http://schemas.microsoft.com/office/drawing/2014/main" id="{955706CF-53F1-5A68-06F5-EBBC33E68CBB}"/>
+              </a:ext>
+            </a:extLst>
+          </p:cNvPr>
+          <p:cNvSpPr>
+            <a:spLocks noGrp="1"/>
+          </p:cNvSpPr>
+          <p:nvPr>
+            <p:ph type="title"/>
+          </p:nvPr>
+        </p:nvSpPr>
+        <p:spPr/>
+        <p:txBody>
+          <a:bodyPr/>
+          <a:lstStyle/>
+          <a:p>
+            <a:r>
+              <a:rPr lang="en-US" altLang="ko-KR" dirty="0"/>
+              <a:t>Results</a:t>
+            </a:r>
+            <a:endParaRPr lang="ko-KR" altLang="en-US" dirty="0"/>
+          </a:p>
+        </p:txBody>
+      </p:sp>
+      <p:sp>
+        <p:nvSpPr>
+          <p:cNvPr id="4" name="텍스트 개체 틀 3">
+            <a:extLst>
+              <a:ext uri="{FF2B5EF4-FFF2-40B4-BE49-F238E27FC236}">
+                <a16:creationId xmlns:a16="http://schemas.microsoft.com/office/drawing/2014/main" id="{9D8A7978-3CE9-E1DC-19FA-E2E1F4BDEDD2}"/>
+              </a:ext>
+            </a:extLst>
+          </p:cNvPr>
+          <p:cNvSpPr>
+            <a:spLocks noGrp="1"/>
+          </p:cNvSpPr>
+          <p:nvPr>
+            <p:ph type="body" sz="quarter" idx="15"/>
+          </p:nvPr>
+        </p:nvSpPr>
+        <p:spPr>
+          <a:xfrm>
+            <a:off x="838200" y="856973"/>
+            <a:ext cx="10515598" cy="335413"/>
+          </a:xfrm>
+        </p:spPr>
+        <p:txBody>
+          <a:bodyPr/>
+          <a:lstStyle/>
+          <a:p>
+            <a:r>
+              <a:rPr lang="en-US" altLang="ko-KR" dirty="0"/>
+              <a:t>Tracking Error Distribution Modeling</a:t>
+            </a:r>
+            <a:endParaRPr lang="ko-KR" altLang="en-US" dirty="0"/>
+          </a:p>
+        </p:txBody>
+      </p:sp>
+      <p:sp>
+        <p:nvSpPr>
+          <p:cNvPr id="5" name="내용 개체 틀 4">
+            <a:extLst>
+              <a:ext uri="{FF2B5EF4-FFF2-40B4-BE49-F238E27FC236}">
+                <a16:creationId xmlns:a16="http://schemas.microsoft.com/office/drawing/2014/main" id="{79E30939-B6A8-25EB-EBB1-D74E64A2F928}"/>
+              </a:ext>
+            </a:extLst>
+          </p:cNvPr>
+          <p:cNvSpPr>
+            <a:spLocks noGrp="1"/>
+          </p:cNvSpPr>
+          <p:nvPr>
+            <p:ph idx="16"/>
+          </p:nvPr>
+        </p:nvSpPr>
+        <p:spPr/>
+        <p:txBody>
+          <a:bodyPr>
+            <a:normAutofit/>
+          </a:bodyPr>
+          <a:lstStyle/>
+          <a:p>
+            <a:r>
+              <a:rPr lang="en-US" altLang="ko-KR" sz="1600" dirty="0"/>
+              <a:t>Probability plot</a:t>
+            </a:r>
+            <a:r>
+              <a:rPr lang="ko-KR" altLang="en-US" sz="1600" dirty="0"/>
+              <a:t>을 통해 </a:t>
+            </a:r>
+            <a:r>
+              <a:rPr lang="en-US" altLang="ko-KR" sz="1600" dirty="0"/>
+              <a:t>Lognormal distribution</a:t>
+            </a:r>
+            <a:r>
+              <a:rPr lang="ko-KR" altLang="en-US" sz="1600" dirty="0"/>
+              <a:t>으로 결정함</a:t>
+            </a:r>
+          </a:p>
+        </p:txBody>
+      </p:sp>
+      <p:grpSp>
+        <p:nvGrpSpPr>
+          <p:cNvPr id="10" name="그룹 9">
+            <a:extLst>
+              <a:ext uri="{FF2B5EF4-FFF2-40B4-BE49-F238E27FC236}">
+                <a16:creationId xmlns:a16="http://schemas.microsoft.com/office/drawing/2014/main" id="{B70E2B7F-D400-D257-3171-B85C465BB2C5}"/>
+              </a:ext>
+            </a:extLst>
+          </p:cNvPr>
+          <p:cNvGrpSpPr/>
+          <p:nvPr/>
+        </p:nvGrpSpPr>
+        <p:grpSpPr>
+          <a:xfrm>
+            <a:off x="245181" y="2101359"/>
+            <a:ext cx="11701632" cy="3906044"/>
+            <a:chOff x="-1321524" y="2111098"/>
+            <a:chExt cx="12095521" cy="4037526"/>
+          </a:xfrm>
+        </p:grpSpPr>
+        <p:pic>
+          <p:nvPicPr>
+            <p:cNvPr id="6" name="그림 5">
+              <a:extLst>
+                <a:ext uri="{FF2B5EF4-FFF2-40B4-BE49-F238E27FC236}">
+                  <a16:creationId xmlns:a16="http://schemas.microsoft.com/office/drawing/2014/main" id="{96EA5786-913C-EEA1-BDFF-5A1B579AD9D7}"/>
+                </a:ext>
+              </a:extLst>
+            </p:cNvPr>
+            <p:cNvPicPr>
+              <a:picLocks noChangeAspect="1"/>
+            </p:cNvPicPr>
+            <p:nvPr/>
+          </p:nvPicPr>
+          <p:blipFill>
+            <a:blip r:embed="rId2"/>
+            <a:stretch>
+              <a:fillRect/>
+            </a:stretch>
+          </p:blipFill>
+          <p:spPr>
+            <a:xfrm>
+              <a:off x="-1321524" y="2111098"/>
+              <a:ext cx="5972175" cy="2018763"/>
+            </a:xfrm>
+            <a:prstGeom prst="rect">
+              <a:avLst/>
+            </a:prstGeom>
+          </p:spPr>
+        </p:pic>
+        <p:pic>
+          <p:nvPicPr>
+            <p:cNvPr id="7" name="그림 6">
+              <a:extLst>
+                <a:ext uri="{FF2B5EF4-FFF2-40B4-BE49-F238E27FC236}">
+                  <a16:creationId xmlns:a16="http://schemas.microsoft.com/office/drawing/2014/main" id="{ABC2B161-8796-989A-E0B6-563F877B7A85}"/>
+                </a:ext>
+              </a:extLst>
+            </p:cNvPr>
+            <p:cNvPicPr>
+              <a:picLocks noChangeAspect="1"/>
+            </p:cNvPicPr>
+            <p:nvPr/>
+          </p:nvPicPr>
+          <p:blipFill>
+            <a:blip r:embed="rId3"/>
+            <a:stretch>
+              <a:fillRect/>
+            </a:stretch>
+          </p:blipFill>
+          <p:spPr>
+            <a:xfrm>
+              <a:off x="-1321520" y="4129861"/>
+              <a:ext cx="5972171" cy="2018763"/>
+            </a:xfrm>
+            <a:prstGeom prst="rect">
+              <a:avLst/>
+            </a:prstGeom>
+          </p:spPr>
+        </p:pic>
+        <p:pic>
+          <p:nvPicPr>
+            <p:cNvPr id="8" name="그림 7">
+              <a:extLst>
+                <a:ext uri="{FF2B5EF4-FFF2-40B4-BE49-F238E27FC236}">
+                  <a16:creationId xmlns:a16="http://schemas.microsoft.com/office/drawing/2014/main" id="{AD160599-1B1D-161D-8310-45A4AF3F1EFA}"/>
+                </a:ext>
+              </a:extLst>
+            </p:cNvPr>
+            <p:cNvPicPr>
+              <a:picLocks noChangeAspect="1"/>
+            </p:cNvPicPr>
+            <p:nvPr/>
+          </p:nvPicPr>
+          <p:blipFill>
+            <a:blip r:embed="rId4"/>
+            <a:stretch>
+              <a:fillRect/>
+            </a:stretch>
+          </p:blipFill>
+          <p:spPr>
+            <a:xfrm>
+              <a:off x="4801826" y="2111098"/>
+              <a:ext cx="5972171" cy="2018762"/>
+            </a:xfrm>
+            <a:prstGeom prst="rect">
+              <a:avLst/>
+            </a:prstGeom>
+          </p:spPr>
+        </p:pic>
+        <p:pic>
+          <p:nvPicPr>
+            <p:cNvPr id="9" name="그림 8">
+              <a:extLst>
+                <a:ext uri="{FF2B5EF4-FFF2-40B4-BE49-F238E27FC236}">
+                  <a16:creationId xmlns:a16="http://schemas.microsoft.com/office/drawing/2014/main" id="{A9E6A1C1-773E-5BB4-BFAD-4684F530CABE}"/>
+                </a:ext>
+              </a:extLst>
+            </p:cNvPr>
+            <p:cNvPicPr>
+              <a:picLocks noChangeAspect="1"/>
+            </p:cNvPicPr>
+            <p:nvPr/>
+          </p:nvPicPr>
+          <p:blipFill>
+            <a:blip r:embed="rId5"/>
+            <a:stretch>
+              <a:fillRect/>
+            </a:stretch>
+          </p:blipFill>
+          <p:spPr>
+            <a:xfrm>
+              <a:off x="4801823" y="4129860"/>
+              <a:ext cx="5972174" cy="2018764"/>
+            </a:xfrm>
+            <a:prstGeom prst="rect">
+              <a:avLst/>
+            </a:prstGeom>
+          </p:spPr>
+        </p:pic>
+      </p:grpSp>
+    </p:spTree>
+    <p:extLst>
+      <p:ext uri="{BB962C8B-B14F-4D97-AF65-F5344CB8AC3E}">
+        <p14:creationId xmlns:p14="http://schemas.microsoft.com/office/powerpoint/2010/main" val="615476234"/>
+      </p:ext>
+    </p:extLst>
+  </p:cSld>
+  <p:clrMapOvr>
+    <a:masterClrMapping/>
+  </p:clrMapOvr>
+</p:sld>
+</file>
+
+<file path=ppt/slides/slide11.xml><?xml version="1.0" encoding="utf-8"?>
+<p:sld xmlns:a="http://schemas.openxmlformats.org/drawingml/2006/main" xmlns:r="http://schemas.openxmlformats.org/officeDocument/2006/relationships" xmlns:p="http://schemas.openxmlformats.org/presentationml/2006/main">
+  <p:cSld>
+    <p:spTree>
+      <p:nvGrpSpPr>
+        <p:cNvPr id="1" name=""/>
+        <p:cNvGrpSpPr/>
+        <p:nvPr/>
+      </p:nvGrpSpPr>
+      <p:grpSpPr>
+        <a:xfrm>
+          <a:off x="0" y="0"/>
+          <a:ext cx="0" cy="0"/>
+          <a:chOff x="0" y="0"/>
+          <a:chExt cx="0" cy="0"/>
+        </a:xfrm>
+      </p:grpSpPr>
+      <p:sp>
+        <p:nvSpPr>
+          <p:cNvPr id="3" name="슬라이드 번호 개체 틀 2">
+            <a:extLst>
+              <a:ext uri="{FF2B5EF4-FFF2-40B4-BE49-F238E27FC236}">
+                <a16:creationId xmlns:a16="http://schemas.microsoft.com/office/drawing/2014/main" id="{AFA75D8C-0D28-65A7-EED2-058C8165A7AD}"/>
+              </a:ext>
+            </a:extLst>
+          </p:cNvPr>
+          <p:cNvSpPr>
+            <a:spLocks noGrp="1"/>
+          </p:cNvSpPr>
+          <p:nvPr>
+            <p:ph type="sldNum" sz="quarter" idx="12"/>
+          </p:nvPr>
+        </p:nvSpPr>
+        <p:spPr/>
+        <p:txBody>
+          <a:bodyPr/>
+          <a:lstStyle/>
+          <a:p>
+            <a:fld id="{03396D25-9861-42CC-B82C-BA5CD8B5B13B}" type="slidenum">
+              <a:rPr lang="ko-KR" altLang="en-US" smtClean="0"/>
+              <a:pPr/>
+              <a:t>11</a:t>
+            </a:fld>
+            <a:endParaRPr lang="ko-KR" altLang="en-US"/>
+          </a:p>
+        </p:txBody>
+      </p:sp>
+      <p:sp>
+        <p:nvSpPr>
+          <p:cNvPr id="7" name="제목 6">
+            <a:extLst>
+              <a:ext uri="{FF2B5EF4-FFF2-40B4-BE49-F238E27FC236}">
+                <a16:creationId xmlns:a16="http://schemas.microsoft.com/office/drawing/2014/main" id="{AA8FD395-2341-E78F-D47B-5C5BDA978AD5}"/>
+              </a:ext>
+            </a:extLst>
+          </p:cNvPr>
+          <p:cNvSpPr>
+            <a:spLocks noGrp="1"/>
+          </p:cNvSpPr>
+          <p:nvPr>
+            <p:ph type="title"/>
+          </p:nvPr>
+        </p:nvSpPr>
+        <p:spPr/>
+        <p:txBody>
+          <a:bodyPr/>
+          <a:lstStyle/>
+          <a:p>
+            <a:endParaRPr lang="ko-KR" altLang="en-US"/>
+          </a:p>
+        </p:txBody>
+      </p:sp>
+      <p:sp>
+        <p:nvSpPr>
+          <p:cNvPr id="8" name="텍스트 개체 틀 7">
+            <a:extLst>
+              <a:ext uri="{FF2B5EF4-FFF2-40B4-BE49-F238E27FC236}">
+                <a16:creationId xmlns:a16="http://schemas.microsoft.com/office/drawing/2014/main" id="{9EBC0C0D-57F0-599C-3F9D-6BD45B5319AF}"/>
+              </a:ext>
+            </a:extLst>
+          </p:cNvPr>
+          <p:cNvSpPr>
+            <a:spLocks noGrp="1"/>
+          </p:cNvSpPr>
+          <p:nvPr>
+            <p:ph type="body" sz="quarter" idx="15"/>
+          </p:nvPr>
+        </p:nvSpPr>
+        <p:spPr/>
+        <p:txBody>
+          <a:bodyPr/>
+          <a:lstStyle/>
+          <a:p>
+            <a:endParaRPr lang="ko-KR" altLang="en-US"/>
+          </a:p>
+        </p:txBody>
+      </p:sp>
+      <p:sp>
+        <p:nvSpPr>
+          <p:cNvPr id="9" name="내용 개체 틀 8">
+            <a:extLst>
+              <a:ext uri="{FF2B5EF4-FFF2-40B4-BE49-F238E27FC236}">
+                <a16:creationId xmlns:a16="http://schemas.microsoft.com/office/drawing/2014/main" id="{855C2126-0744-7A36-44D4-D718541FE284}"/>
+              </a:ext>
+            </a:extLst>
+          </p:cNvPr>
+          <p:cNvSpPr>
+            <a:spLocks noGrp="1"/>
+          </p:cNvSpPr>
+          <p:nvPr>
+            <p:ph idx="16"/>
+          </p:nvPr>
+        </p:nvSpPr>
+        <p:spPr/>
+        <p:txBody>
+          <a:bodyPr/>
+          <a:lstStyle/>
+          <a:p>
+            <a:endParaRPr lang="ko-KR" altLang="en-US"/>
+          </a:p>
+        </p:txBody>
+      </p:sp>
+    </p:spTree>
+    <p:extLst>
+      <p:ext uri="{BB962C8B-B14F-4D97-AF65-F5344CB8AC3E}">
+        <p14:creationId xmlns:p14="http://schemas.microsoft.com/office/powerpoint/2010/main" val="1951321855"/>
+      </p:ext>
+    </p:extLst>
+  </p:cSld>
+  <p:clrMapOvr>
+    <a:masterClrMapping/>
+  </p:clrMapOvr>
+</p:sld>
+</file>
+
+<file path=ppt/slides/slide12.xml><?xml version="1.0" encoding="utf-8"?>
+<p:sld xmlns:a="http://schemas.openxmlformats.org/drawingml/2006/main" xmlns:r="http://schemas.openxmlformats.org/officeDocument/2006/relationships" xmlns:p="http://schemas.openxmlformats.org/presentationml/2006/main">
+  <p:cSld>
+    <p:spTree>
+      <p:nvGrpSpPr>
+        <p:cNvPr id="1" name=""/>
+        <p:cNvGrpSpPr/>
+        <p:nvPr/>
+      </p:nvGrpSpPr>
+      <p:grpSpPr>
+        <a:xfrm>
+          <a:off x="0" y="0"/>
+          <a:ext cx="0" cy="0"/>
+          <a:chOff x="0" y="0"/>
+          <a:chExt cx="0" cy="0"/>
+        </a:xfrm>
+      </p:grpSpPr>
+      <p:sp>
+        <p:nvSpPr>
+          <p:cNvPr id="3" name="슬라이드 번호 개체 틀 2">
+            <a:extLst>
+              <a:ext uri="{FF2B5EF4-FFF2-40B4-BE49-F238E27FC236}">
+                <a16:creationId xmlns:a16="http://schemas.microsoft.com/office/drawing/2014/main" id="{A74CB442-50A7-3152-58FE-904881FB9441}"/>
+              </a:ext>
+            </a:extLst>
+          </p:cNvPr>
+          <p:cNvSpPr>
+            <a:spLocks noGrp="1"/>
+          </p:cNvSpPr>
+          <p:nvPr>
+            <p:ph type="sldNum" sz="quarter" idx="12"/>
+          </p:nvPr>
+        </p:nvSpPr>
+        <p:spPr/>
+        <p:txBody>
+          <a:bodyPr/>
+          <a:lstStyle/>
+          <a:p>
+            <a:fld id="{03396D25-9861-42CC-B82C-BA5CD8B5B13B}" type="slidenum">
+              <a:rPr lang="ko-KR" altLang="en-US" smtClean="0"/>
+              <a:pPr/>
+              <a:t>12</a:t>
+            </a:fld>
+            <a:endParaRPr lang="ko-KR" altLang="en-US"/>
+          </a:p>
+        </p:txBody>
+      </p:sp>
+      <p:sp>
+        <p:nvSpPr>
+          <p:cNvPr id="7" name="제목 6">
+            <a:extLst>
+              <a:ext uri="{FF2B5EF4-FFF2-40B4-BE49-F238E27FC236}">
+                <a16:creationId xmlns:a16="http://schemas.microsoft.com/office/drawing/2014/main" id="{5641E316-1029-B502-E52F-2F71A524B0C3}"/>
+              </a:ext>
+            </a:extLst>
+          </p:cNvPr>
+          <p:cNvSpPr>
+            <a:spLocks noGrp="1"/>
+          </p:cNvSpPr>
+          <p:nvPr>
+            <p:ph type="title"/>
+          </p:nvPr>
+        </p:nvSpPr>
+        <p:spPr/>
+        <p:txBody>
+          <a:bodyPr/>
+          <a:lstStyle/>
+          <a:p>
+            <a:r>
+              <a:rPr lang="en-US" altLang="ko-KR" dirty="0"/>
+              <a:t>Reference</a:t>
+            </a:r>
+            <a:endParaRPr lang="ko-KR" altLang="en-US" dirty="0"/>
+          </a:p>
+        </p:txBody>
+      </p:sp>
+      <p:sp>
+        <p:nvSpPr>
+          <p:cNvPr id="8" name="내용 개체 틀 7">
+            <a:extLst>
+              <a:ext uri="{FF2B5EF4-FFF2-40B4-BE49-F238E27FC236}">
+                <a16:creationId xmlns:a16="http://schemas.microsoft.com/office/drawing/2014/main" id="{B59216C8-A4B4-7196-15A3-AF94A0787DD0}"/>
+              </a:ext>
+            </a:extLst>
+          </p:cNvPr>
+          <p:cNvSpPr>
+            <a:spLocks noGrp="1"/>
+          </p:cNvSpPr>
+          <p:nvPr>
+            <p:ph idx="16"/>
+          </p:nvPr>
+        </p:nvSpPr>
+        <p:spPr/>
+        <p:txBody>
+          <a:bodyPr>
+            <a:normAutofit/>
+          </a:bodyPr>
+          <a:lstStyle/>
+          <a:p>
+            <a:pPr marL="180975" indent="-180975">
+              <a:buFont typeface="+mj-lt"/>
+              <a:buAutoNum type="arabicPeriod"/>
+            </a:pPr>
+            <a:r>
+              <a:rPr lang="en-US" altLang="ko-KR" sz="1400" dirty="0">
+                <a:latin typeface="Times New Roman" panose="02020603050405020304" pitchFamily="18" charset="0"/>
+                <a:cs typeface="Times New Roman" panose="02020603050405020304" pitchFamily="18" charset="0"/>
+              </a:rPr>
+              <a:t>Qiao, </a:t>
+            </a:r>
+            <a:r>
+              <a:rPr lang="en-US" altLang="ko-KR" sz="1400" dirty="0" err="1">
+                <a:latin typeface="Times New Roman" panose="02020603050405020304" pitchFamily="18" charset="0"/>
+                <a:cs typeface="Times New Roman" panose="02020603050405020304" pitchFamily="18" charset="0"/>
+              </a:rPr>
+              <a:t>Guixiu</a:t>
+            </a:r>
+            <a:r>
+              <a:rPr lang="en-US" altLang="ko-KR" sz="1400" dirty="0">
+                <a:latin typeface="Times New Roman" panose="02020603050405020304" pitchFamily="18" charset="0"/>
+                <a:cs typeface="Times New Roman" panose="02020603050405020304" pitchFamily="18" charset="0"/>
+              </a:rPr>
+              <a:t>, and Brian A. Weiss. "Accuracy degradation analysis for industrial robot systems." International Manufacturing Science and Engineering Conference. Vol. 50749. American Society of Mechanical Engineers, 2017.</a:t>
+            </a:r>
+            <a:endParaRPr lang="ko-KR" altLang="en-US" sz="1400" dirty="0">
+              <a:latin typeface="Times New Roman" panose="02020603050405020304" pitchFamily="18" charset="0"/>
+              <a:cs typeface="Times New Roman" panose="02020603050405020304" pitchFamily="18" charset="0"/>
+            </a:endParaRPr>
+          </a:p>
+        </p:txBody>
+      </p:sp>
+    </p:spTree>
+    <p:extLst>
+      <p:ext uri="{BB962C8B-B14F-4D97-AF65-F5344CB8AC3E}">
+        <p14:creationId xmlns:p14="http://schemas.microsoft.com/office/powerpoint/2010/main" val="1486698502"/>
+      </p:ext>
+    </p:extLst>
+  </p:cSld>
+  <p:clrMapOvr>
+    <a:masterClrMapping/>
+  </p:clrMapOvr>
+</p:sld>
+</file>
+
 <file path=ppt/slides/slide2.xml><?xml version="1.0" encoding="utf-8"?>
 <p:sld xmlns:a="http://schemas.openxmlformats.org/drawingml/2006/main" xmlns:r="http://schemas.openxmlformats.org/officeDocument/2006/relationships" xmlns:p="http://schemas.openxmlformats.org/presentationml/2006/main">
   <p:cSld>
@@ -3154,6 +3749,10 @@
           <a:bodyPr/>
           <a:lstStyle/>
           <a:p>
+            <a:r>
+              <a:rPr lang="en-US" altLang="ko-KR" dirty="0"/>
+              <a:t>Industrial Applications of Robot Manipulators</a:t>
+            </a:r>
             <a:endParaRPr lang="ko-KR" altLang="en-US" dirty="0"/>
           </a:p>
         </p:txBody>
@@ -3176,13 +3775,323 @@
         </p:nvSpPr>
         <p:spPr/>
         <p:txBody>
-          <a:bodyPr/>
+          <a:bodyPr>
+            <a:normAutofit/>
+          </a:bodyPr>
           <a:lstStyle/>
           <a:p>
-            <a:endParaRPr lang="ko-KR" altLang="en-US"/>
-          </a:p>
-        </p:txBody>
-      </p:sp>
+            <a:pPr>
+              <a:lnSpc>
+                <a:spcPct val="150000"/>
+              </a:lnSpc>
+            </a:pPr>
+            <a:r>
+              <a:rPr lang="en-US" altLang="ko-KR" sz="1600" dirty="0"/>
+              <a:t>Manipulator</a:t>
+            </a:r>
+            <a:r>
+              <a:rPr lang="ko-KR" altLang="en-US" sz="1600" dirty="0"/>
+              <a:t>는 스마트 </a:t>
+            </a:r>
+            <a:r>
+              <a:rPr lang="ko-KR" altLang="en-US" sz="1600" dirty="0" err="1"/>
+              <a:t>팩토리에서</a:t>
+            </a:r>
+            <a:r>
+              <a:rPr lang="ko-KR" altLang="en-US" sz="1600" dirty="0"/>
+              <a:t> </a:t>
+            </a:r>
+            <a:r>
+              <a:rPr lang="ko-KR" altLang="en-US" sz="1600" b="1" dirty="0">
+                <a:solidFill>
+                  <a:srgbClr val="0000FF"/>
+                </a:solidFill>
+              </a:rPr>
+              <a:t>조립</a:t>
+            </a:r>
+            <a:r>
+              <a:rPr lang="en-US" altLang="ko-KR" sz="1600" b="1" dirty="0">
+                <a:solidFill>
+                  <a:srgbClr val="0000FF"/>
+                </a:solidFill>
+              </a:rPr>
+              <a:t>(assembly), </a:t>
+            </a:r>
+            <a:r>
+              <a:rPr lang="ko-KR" altLang="en-US" sz="1600" b="1" dirty="0" err="1">
+                <a:solidFill>
+                  <a:srgbClr val="0000FF"/>
+                </a:solidFill>
+              </a:rPr>
+              <a:t>픽앤플레이스</a:t>
+            </a:r>
+            <a:r>
+              <a:rPr lang="en-US" altLang="ko-KR" sz="1600" b="1" dirty="0">
+                <a:solidFill>
+                  <a:srgbClr val="0000FF"/>
+                </a:solidFill>
+              </a:rPr>
+              <a:t>(pick-and-place) </a:t>
+            </a:r>
+            <a:r>
+              <a:rPr lang="ko-KR" altLang="en-US" sz="1600" dirty="0"/>
+              <a:t>등 정밀 반복 공정에 사용되고 있음</a:t>
+            </a:r>
+            <a:endParaRPr lang="en-US" altLang="ko-KR" sz="1600" dirty="0"/>
+          </a:p>
+          <a:p>
+            <a:pPr>
+              <a:lnSpc>
+                <a:spcPct val="150000"/>
+              </a:lnSpc>
+            </a:pPr>
+            <a:r>
+              <a:rPr lang="ko-KR" altLang="en-US" sz="1600" dirty="0"/>
+              <a:t>이러한 정밀 반복 공정에서 로봇 말단부</a:t>
+            </a:r>
+            <a:r>
+              <a:rPr lang="en-US" altLang="ko-KR" sz="1600" dirty="0"/>
+              <a:t>(end effector)</a:t>
+            </a:r>
+            <a:r>
+              <a:rPr lang="ko-KR" altLang="en-US" sz="1600" dirty="0"/>
+              <a:t>의 자세 오차는 작업의 실패와 직결됨</a:t>
+            </a:r>
+            <a:endParaRPr lang="en-US" altLang="ko-KR" sz="1600" dirty="0"/>
+          </a:p>
+        </p:txBody>
+      </p:sp>
+      <p:grpSp>
+        <p:nvGrpSpPr>
+          <p:cNvPr id="10" name="그룹 9">
+            <a:extLst>
+              <a:ext uri="{FF2B5EF4-FFF2-40B4-BE49-F238E27FC236}">
+                <a16:creationId xmlns:a16="http://schemas.microsoft.com/office/drawing/2014/main" id="{F7584DA5-F215-CBD1-27AD-D2FD2A3ACC54}"/>
+              </a:ext>
+            </a:extLst>
+          </p:cNvPr>
+          <p:cNvGrpSpPr/>
+          <p:nvPr/>
+        </p:nvGrpSpPr>
+        <p:grpSpPr>
+          <a:xfrm>
+            <a:off x="2314336" y="2913228"/>
+            <a:ext cx="7563321" cy="3263735"/>
+            <a:chOff x="1865811" y="2604998"/>
+            <a:chExt cx="8277607" cy="3571965"/>
+          </a:xfrm>
+        </p:grpSpPr>
+        <p:grpSp>
+          <p:nvGrpSpPr>
+            <p:cNvPr id="6" name="그룹 5">
+              <a:extLst>
+                <a:ext uri="{FF2B5EF4-FFF2-40B4-BE49-F238E27FC236}">
+                  <a16:creationId xmlns:a16="http://schemas.microsoft.com/office/drawing/2014/main" id="{5BE12E6C-A8B2-B184-FA28-D229EEB9FD79}"/>
+                </a:ext>
+              </a:extLst>
+            </p:cNvPr>
+            <p:cNvGrpSpPr/>
+            <p:nvPr/>
+          </p:nvGrpSpPr>
+          <p:grpSpPr>
+            <a:xfrm>
+              <a:off x="1865811" y="2604998"/>
+              <a:ext cx="2778034" cy="3571965"/>
+              <a:chOff x="1865811" y="2604998"/>
+              <a:chExt cx="2778034" cy="3571965"/>
+            </a:xfrm>
+          </p:grpSpPr>
+          <p:pic>
+            <p:nvPicPr>
+              <p:cNvPr id="1026" name="Picture 2" descr="A Solution to Challenging Assembly Tasks - ATI Industrial Automation">
+                <a:extLst>
+                  <a:ext uri="{FF2B5EF4-FFF2-40B4-BE49-F238E27FC236}">
+                    <a16:creationId xmlns:a16="http://schemas.microsoft.com/office/drawing/2014/main" id="{AA776BB0-9FF4-35CC-092F-39B2F9B7AC10}"/>
+                  </a:ext>
+                </a:extLst>
+              </p:cNvPr>
+              <p:cNvPicPr>
+                <a:picLocks noChangeAspect="1" noChangeArrowheads="1"/>
+              </p:cNvPicPr>
+              <p:nvPr/>
+            </p:nvPicPr>
+            <p:blipFill>
+              <a:blip r:embed="rId2">
+                <a:extLst>
+                  <a:ext uri="{28A0092B-C50C-407E-A947-70E740481C1C}">
+                    <a14:useLocalDpi xmlns:a14="http://schemas.microsoft.com/office/drawing/2010/main" val="0"/>
+                  </a:ext>
+                </a:extLst>
+              </a:blip>
+              <a:srcRect/>
+              <a:stretch>
+                <a:fillRect/>
+              </a:stretch>
+            </p:blipFill>
+            <p:spPr bwMode="auto">
+              <a:xfrm>
+                <a:off x="1865811" y="2604998"/>
+                <a:ext cx="2778034" cy="3238935"/>
+              </a:xfrm>
+              <a:prstGeom prst="rect">
+                <a:avLst/>
+              </a:prstGeom>
+              <a:noFill/>
+              <a:extLst>
+                <a:ext uri="{909E8E84-426E-40DD-AFC4-6F175D3DCCD1}">
+                  <a14:hiddenFill xmlns:a14="http://schemas.microsoft.com/office/drawing/2010/main">
+                    <a:solidFill>
+                      <a:srgbClr val="FFFFFF"/>
+                    </a:solidFill>
+                  </a14:hiddenFill>
+                </a:ext>
+              </a:extLst>
+            </p:spPr>
+          </p:pic>
+          <p:sp>
+            <p:nvSpPr>
+              <p:cNvPr id="2" name="TextBox 1">
+                <a:extLst>
+                  <a:ext uri="{FF2B5EF4-FFF2-40B4-BE49-F238E27FC236}">
+                    <a16:creationId xmlns:a16="http://schemas.microsoft.com/office/drawing/2014/main" id="{AF73077F-92F0-63FC-AC1F-7B427108F79F}"/>
+                  </a:ext>
+                </a:extLst>
+              </p:cNvPr>
+              <p:cNvSpPr txBox="1"/>
+              <p:nvPr/>
+            </p:nvSpPr>
+            <p:spPr>
+              <a:xfrm>
+                <a:off x="2114005" y="5869186"/>
+                <a:ext cx="2281646" cy="307777"/>
+              </a:xfrm>
+              <a:prstGeom prst="rect">
+                <a:avLst/>
+              </a:prstGeom>
+              <a:noFill/>
+            </p:spPr>
+            <p:txBody>
+              <a:bodyPr wrap="square" rtlCol="0">
+                <a:spAutoFit/>
+              </a:bodyPr>
+              <a:lstStyle/>
+              <a:p>
+                <a:pPr algn="ctr"/>
+                <a:r>
+                  <a:rPr lang="en-US" altLang="ko-KR" sz="1400" b="1" dirty="0"/>
+                  <a:t>Assembly</a:t>
+                </a:r>
+                <a:endParaRPr lang="ko-KR" altLang="en-US" sz="1400" b="1" dirty="0"/>
+              </a:p>
+            </p:txBody>
+          </p:sp>
+        </p:grpSp>
+        <p:grpSp>
+          <p:nvGrpSpPr>
+            <p:cNvPr id="5" name="그룹 4">
+              <a:extLst>
+                <a:ext uri="{FF2B5EF4-FFF2-40B4-BE49-F238E27FC236}">
+                  <a16:creationId xmlns:a16="http://schemas.microsoft.com/office/drawing/2014/main" id="{EA35F88C-1677-9A0D-533A-251C6B6F7944}"/>
+                </a:ext>
+              </a:extLst>
+            </p:cNvPr>
+            <p:cNvGrpSpPr/>
+            <p:nvPr/>
+          </p:nvGrpSpPr>
+          <p:grpSpPr>
+            <a:xfrm>
+              <a:off x="5285015" y="2604998"/>
+              <a:ext cx="4858403" cy="3571965"/>
+              <a:chOff x="5285015" y="2604998"/>
+              <a:chExt cx="4858403" cy="3571965"/>
+            </a:xfrm>
+          </p:grpSpPr>
+          <p:pic>
+            <p:nvPicPr>
+              <p:cNvPr id="1028" name="Picture 4" descr="What is a Pick and Place Robot? Uses and Types - Robotics 24/7">
+                <a:extLst>
+                  <a:ext uri="{FF2B5EF4-FFF2-40B4-BE49-F238E27FC236}">
+                    <a16:creationId xmlns:a16="http://schemas.microsoft.com/office/drawing/2014/main" id="{E06414DF-7597-3AA5-910D-E143D7BEF404}"/>
+                  </a:ext>
+                </a:extLst>
+              </p:cNvPr>
+              <p:cNvPicPr>
+                <a:picLocks noChangeAspect="1" noChangeArrowheads="1"/>
+              </p:cNvPicPr>
+              <p:nvPr/>
+            </p:nvPicPr>
+            <p:blipFill>
+              <a:blip r:embed="rId3">
+                <a:extLst>
+                  <a:ext uri="{28A0092B-C50C-407E-A947-70E740481C1C}">
+                    <a14:useLocalDpi xmlns:a14="http://schemas.microsoft.com/office/drawing/2010/main" val="0"/>
+                  </a:ext>
+                </a:extLst>
+              </a:blip>
+              <a:srcRect/>
+              <a:stretch>
+                <a:fillRect/>
+              </a:stretch>
+            </p:blipFill>
+            <p:spPr bwMode="auto">
+              <a:xfrm>
+                <a:off x="5285015" y="2604998"/>
+                <a:ext cx="4858403" cy="3238935"/>
+              </a:xfrm>
+              <a:prstGeom prst="rect">
+                <a:avLst/>
+              </a:prstGeom>
+              <a:noFill/>
+              <a:extLst>
+                <a:ext uri="{909E8E84-426E-40DD-AFC4-6F175D3DCCD1}">
+                  <a14:hiddenFill xmlns:a14="http://schemas.microsoft.com/office/drawing/2010/main">
+                    <a:solidFill>
+                      <a:srgbClr val="FFFFFF"/>
+                    </a:solidFill>
+                  </a14:hiddenFill>
+                </a:ext>
+              </a:extLst>
+            </p:spPr>
+          </p:pic>
+          <p:sp>
+            <p:nvSpPr>
+              <p:cNvPr id="4" name="TextBox 3">
+                <a:extLst>
+                  <a:ext uri="{FF2B5EF4-FFF2-40B4-BE49-F238E27FC236}">
+                    <a16:creationId xmlns:a16="http://schemas.microsoft.com/office/drawing/2014/main" id="{31FEA376-9419-48C2-413D-4065DF149F22}"/>
+                  </a:ext>
+                </a:extLst>
+              </p:cNvPr>
+              <p:cNvSpPr txBox="1"/>
+              <p:nvPr/>
+            </p:nvSpPr>
+            <p:spPr>
+              <a:xfrm>
+                <a:off x="6573393" y="5869186"/>
+                <a:ext cx="2281646" cy="307777"/>
+              </a:xfrm>
+              <a:prstGeom prst="rect">
+                <a:avLst/>
+              </a:prstGeom>
+              <a:noFill/>
+            </p:spPr>
+            <p:txBody>
+              <a:bodyPr wrap="square" rtlCol="0">
+                <a:spAutoFit/>
+              </a:bodyPr>
+              <a:lstStyle/>
+              <a:p>
+                <a:pPr algn="ctr"/>
+                <a:r>
+                  <a:rPr lang="en-US" altLang="ko-KR" sz="1400" b="1" dirty="0"/>
+                  <a:t>Pick-and-place</a:t>
+                </a:r>
+                <a:endParaRPr lang="ko-KR" altLang="en-US" sz="1400" b="1" dirty="0"/>
+              </a:p>
+            </p:txBody>
+          </p:sp>
+        </p:grpSp>
+      </p:grpSp>
     </p:spTree>
     <p:extLst>
       <p:ext uri="{BB962C8B-B14F-4D97-AF65-F5344CB8AC3E}">
@@ -3288,12 +4197,20 @@
             <p:ph type="body" sz="quarter" idx="15"/>
           </p:nvPr>
         </p:nvSpPr>
-        <p:spPr/>
+        <p:spPr>
+          <a:xfrm>
+            <a:off x="838200" y="856973"/>
+            <a:ext cx="10515598" cy="335413"/>
+          </a:xfrm>
+        </p:spPr>
         <p:txBody>
           <a:bodyPr/>
           <a:lstStyle/>
           <a:p>
-            <a:endParaRPr lang="ko-KR" altLang="en-US"/>
+            <a:r>
+              <a:rPr lang="en-US" altLang="ko-KR" dirty="0"/>
+              <a:t>Degradation Measurement of Robot Arm Position Accuracy</a:t>
+            </a:r>
           </a:p>
         </p:txBody>
       </p:sp>
@@ -3315,13 +4232,238 @@
         </p:nvSpPr>
         <p:spPr/>
         <p:txBody>
-          <a:bodyPr/>
+          <a:bodyPr>
+            <a:normAutofit/>
+          </a:bodyPr>
           <a:lstStyle/>
           <a:p>
-            <a:endParaRPr lang="ko-KR" altLang="en-US"/>
-          </a:p>
-        </p:txBody>
-      </p:sp>
+            <a:pPr>
+              <a:lnSpc>
+                <a:spcPct val="150000"/>
+              </a:lnSpc>
+            </a:pPr>
+            <a:r>
+              <a:rPr lang="ko-KR" altLang="en-US" sz="1600" dirty="0"/>
+              <a:t>미국 국립표준기술연구소</a:t>
+            </a:r>
+            <a:r>
+              <a:rPr lang="en-US" altLang="ko-KR" sz="1600" dirty="0"/>
+              <a:t>(NIST)</a:t>
+            </a:r>
+            <a:r>
+              <a:rPr lang="ko-KR" altLang="en-US" sz="1600" dirty="0"/>
+              <a:t>에서 제공하는 </a:t>
+            </a:r>
+            <a:r>
+              <a:rPr lang="ko-KR" altLang="en-US" sz="1600" dirty="0" err="1"/>
+              <a:t>다관절</a:t>
+            </a:r>
+            <a:r>
+              <a:rPr lang="ko-KR" altLang="en-US" sz="1600" dirty="0"/>
+              <a:t> 로봇 </a:t>
+            </a:r>
+            <a:r>
+              <a:rPr lang="en-US" altLang="ko-KR" sz="1600" dirty="0"/>
+              <a:t>position accuracy</a:t>
+            </a:r>
+            <a:r>
+              <a:rPr lang="ko-KR" altLang="en-US" sz="1600" dirty="0"/>
+              <a:t> 열화 측정 데이터셋</a:t>
+            </a:r>
+            <a:endParaRPr lang="en-US" altLang="ko-KR" sz="1600" dirty="0"/>
+          </a:p>
+          <a:p>
+            <a:pPr lvl="1">
+              <a:lnSpc>
+                <a:spcPct val="150000"/>
+              </a:lnSpc>
+            </a:pPr>
+            <a:r>
+              <a:rPr lang="en-US" altLang="ko-KR" sz="1400" b="1" dirty="0"/>
+              <a:t>Target Robot:</a:t>
+            </a:r>
+            <a:r>
+              <a:rPr lang="en-US" altLang="ko-KR" sz="1400" dirty="0"/>
+              <a:t> Universal Robots </a:t>
+            </a:r>
+            <a:r>
+              <a:rPr lang="ko-KR" altLang="en-US" sz="1400" dirty="0"/>
+              <a:t>사의 </a:t>
+            </a:r>
+            <a:r>
+              <a:rPr lang="en-US" altLang="ko-KR" sz="1400" dirty="0"/>
+              <a:t>UR5</a:t>
+            </a:r>
+          </a:p>
+          <a:p>
+            <a:pPr lvl="1">
+              <a:lnSpc>
+                <a:spcPct val="150000"/>
+              </a:lnSpc>
+            </a:pPr>
+            <a:r>
+              <a:rPr lang="en-US" altLang="ko-KR" sz="1400" b="1" dirty="0"/>
+              <a:t>Control Factors: </a:t>
+            </a:r>
+            <a:r>
+              <a:rPr lang="en-US" altLang="ko-KR" sz="1400" dirty="0"/>
+              <a:t>Temperature(cold start/normal start), Speed(half speed/ full speed), Payload(1.6lb/ 4.5lb)</a:t>
+            </a:r>
+            <a:endParaRPr lang="ko-KR" altLang="en-US" sz="1400" dirty="0"/>
+          </a:p>
+        </p:txBody>
+      </p:sp>
+      <p:pic>
+        <p:nvPicPr>
+          <p:cNvPr id="2050" name="Picture 2" descr="UR5 Test Result - Robot Measurement">
+            <a:extLst>
+              <a:ext uri="{FF2B5EF4-FFF2-40B4-BE49-F238E27FC236}">
+                <a16:creationId xmlns:a16="http://schemas.microsoft.com/office/drawing/2014/main" id="{0EE4F050-8E6B-D20D-2D53-5134E6FE74BE}"/>
+              </a:ext>
+            </a:extLst>
+          </p:cNvPr>
+          <p:cNvPicPr>
+            <a:picLocks noChangeAspect="1" noChangeArrowheads="1"/>
+          </p:cNvPicPr>
+          <p:nvPr/>
+        </p:nvPicPr>
+        <p:blipFill>
+          <a:blip r:embed="rId2">
+            <a:extLst>
+              <a:ext uri="{28A0092B-C50C-407E-A947-70E740481C1C}">
+                <a14:useLocalDpi xmlns:a14="http://schemas.microsoft.com/office/drawing/2010/main" val="0"/>
+              </a:ext>
+            </a:extLst>
+          </a:blip>
+          <a:srcRect/>
+          <a:stretch>
+            <a:fillRect/>
+          </a:stretch>
+        </p:blipFill>
+        <p:spPr bwMode="auto">
+          <a:xfrm>
+            <a:off x="5670112" y="3008789"/>
+            <a:ext cx="5880976" cy="2462658"/>
+          </a:xfrm>
+          <a:prstGeom prst="rect">
+            <a:avLst/>
+          </a:prstGeom>
+          <a:noFill/>
+          <a:extLst>
+            <a:ext uri="{909E8E84-426E-40DD-AFC4-6F175D3DCCD1}">
+              <a14:hiddenFill xmlns:a14="http://schemas.microsoft.com/office/drawing/2010/main">
+                <a:solidFill>
+                  <a:srgbClr val="FFFFFF"/>
+                </a:solidFill>
+              </a14:hiddenFill>
+            </a:ext>
+          </a:extLst>
+        </p:spPr>
+      </p:pic>
+      <p:sp>
+        <p:nvSpPr>
+          <p:cNvPr id="6" name="TextBox 5">
+            <a:extLst>
+              <a:ext uri="{FF2B5EF4-FFF2-40B4-BE49-F238E27FC236}">
+                <a16:creationId xmlns:a16="http://schemas.microsoft.com/office/drawing/2014/main" id="{CF55BF98-CE5C-6119-F635-AB6B87BE3B07}"/>
+              </a:ext>
+            </a:extLst>
+          </p:cNvPr>
+          <p:cNvSpPr txBox="1"/>
+          <p:nvPr/>
+        </p:nvSpPr>
+        <p:spPr>
+          <a:xfrm>
+            <a:off x="1063540" y="5636922"/>
+            <a:ext cx="3840154" cy="307777"/>
+          </a:xfrm>
+          <a:prstGeom prst="rect">
+            <a:avLst/>
+          </a:prstGeom>
+          <a:noFill/>
+        </p:spPr>
+        <p:txBody>
+          <a:bodyPr wrap="square" rtlCol="0">
+            <a:spAutoFit/>
+          </a:bodyPr>
+          <a:lstStyle/>
+          <a:p>
+            <a:pPr algn="ctr"/>
+            <a:r>
+              <a:rPr lang="en-US" altLang="ko-KR" sz="1400" b="1" dirty="0"/>
+              <a:t>Robot fixed loop motion for test method</a:t>
+            </a:r>
+            <a:endParaRPr lang="ko-KR" altLang="en-US" sz="1400" b="1" dirty="0"/>
+          </a:p>
+        </p:txBody>
+      </p:sp>
+      <p:sp>
+        <p:nvSpPr>
+          <p:cNvPr id="7" name="TextBox 6">
+            <a:extLst>
+              <a:ext uri="{FF2B5EF4-FFF2-40B4-BE49-F238E27FC236}">
+                <a16:creationId xmlns:a16="http://schemas.microsoft.com/office/drawing/2014/main" id="{F870BBD3-2322-AFE4-8048-7D9D966F28F8}"/>
+              </a:ext>
+            </a:extLst>
+          </p:cNvPr>
+          <p:cNvSpPr txBox="1"/>
+          <p:nvPr/>
+        </p:nvSpPr>
+        <p:spPr>
+          <a:xfrm>
+            <a:off x="7469777" y="5693249"/>
+            <a:ext cx="2281646" cy="307777"/>
+          </a:xfrm>
+          <a:prstGeom prst="rect">
+            <a:avLst/>
+          </a:prstGeom>
+          <a:noFill/>
+        </p:spPr>
+        <p:txBody>
+          <a:bodyPr wrap="square" rtlCol="0">
+            <a:spAutoFit/>
+          </a:bodyPr>
+          <a:lstStyle/>
+          <a:p>
+            <a:pPr algn="ctr"/>
+            <a:r>
+              <a:rPr lang="en-US" altLang="ko-KR" sz="1400" b="1" dirty="0"/>
+              <a:t>Data Header</a:t>
+            </a:r>
+            <a:endParaRPr lang="ko-KR" altLang="en-US" sz="1400" b="1" dirty="0"/>
+          </a:p>
+        </p:txBody>
+      </p:sp>
+      <p:pic>
+        <p:nvPicPr>
+          <p:cNvPr id="8" name="그림 7">
+            <a:extLst>
+              <a:ext uri="{FF2B5EF4-FFF2-40B4-BE49-F238E27FC236}">
+                <a16:creationId xmlns:a16="http://schemas.microsoft.com/office/drawing/2014/main" id="{328F8F9E-7B6C-B3C0-5CA1-BD250A733BE9}"/>
+              </a:ext>
+            </a:extLst>
+          </p:cNvPr>
+          <p:cNvPicPr>
+            <a:picLocks noChangeAspect="1"/>
+          </p:cNvPicPr>
+          <p:nvPr/>
+        </p:nvPicPr>
+        <p:blipFill>
+          <a:blip r:embed="rId3"/>
+          <a:stretch>
+            <a:fillRect/>
+          </a:stretch>
+        </p:blipFill>
+        <p:spPr>
+          <a:xfrm>
+            <a:off x="494415" y="3075579"/>
+            <a:ext cx="4978405" cy="2329079"/>
+          </a:xfrm>
+          <a:prstGeom prst="rect">
+            <a:avLst/>
+          </a:prstGeom>
+        </p:spPr>
+      </p:pic>
     </p:spTree>
     <p:extLst>
       <p:ext uri="{BB962C8B-B14F-4D97-AF65-F5344CB8AC3E}">
@@ -3427,12 +4569,20 @@
             <p:ph type="body" sz="quarter" idx="15"/>
           </p:nvPr>
         </p:nvSpPr>
-        <p:spPr/>
+        <p:spPr>
+          <a:xfrm>
+            <a:off x="838200" y="856973"/>
+            <a:ext cx="10515598" cy="335413"/>
+          </a:xfrm>
+        </p:spPr>
         <p:txBody>
           <a:bodyPr/>
           <a:lstStyle/>
           <a:p>
-            <a:endParaRPr lang="ko-KR" altLang="en-US"/>
+            <a:r>
+              <a:rPr lang="en-US" altLang="ko-KR" dirty="0"/>
+              <a:t>Degradation Measurement of Robot Arm Position Accuracy</a:t>
+            </a:r>
           </a:p>
         </p:txBody>
       </p:sp>
@@ -3454,13 +4604,64 @@
         </p:nvSpPr>
         <p:spPr/>
         <p:txBody>
-          <a:bodyPr/>
+          <a:bodyPr>
+            <a:normAutofit/>
+          </a:bodyPr>
           <a:lstStyle/>
           <a:p>
-            <a:endParaRPr lang="ko-KR" altLang="en-US"/>
-          </a:p>
-        </p:txBody>
-      </p:sp>
+            <a:r>
+              <a:rPr lang="ko-KR" altLang="en-US" sz="1600" dirty="0"/>
+              <a:t>해당 데이터의 경우 특정 조건에서 시간이 지남에 따라 노화 등으로 인해 발생하는 </a:t>
+            </a:r>
+            <a:r>
+              <a:rPr lang="en-US" altLang="ko-KR" sz="1600" dirty="0"/>
+              <a:t>position accuracy</a:t>
+            </a:r>
+            <a:r>
+              <a:rPr lang="ko-KR" altLang="en-US" sz="1600" dirty="0"/>
+              <a:t>의 </a:t>
+            </a:r>
+            <a:r>
+              <a:rPr lang="en-US" altLang="ko-KR" sz="1600" dirty="0"/>
+              <a:t>degradation</a:t>
+            </a:r>
+            <a:r>
+              <a:rPr lang="ko-KR" altLang="en-US" sz="1600" dirty="0"/>
+              <a:t>이 뚜렷하게 나타나지 않음</a:t>
+            </a:r>
+          </a:p>
+        </p:txBody>
+      </p:sp>
+      <p:pic>
+        <p:nvPicPr>
+          <p:cNvPr id="8" name="그림 7">
+            <a:extLst>
+              <a:ext uri="{FF2B5EF4-FFF2-40B4-BE49-F238E27FC236}">
+                <a16:creationId xmlns:a16="http://schemas.microsoft.com/office/drawing/2014/main" id="{30B72203-271D-3D14-7E3F-8394F7161566}"/>
+              </a:ext>
+            </a:extLst>
+          </p:cNvPr>
+          <p:cNvPicPr>
+            <a:picLocks noChangeAspect="1"/>
+          </p:cNvPicPr>
+          <p:nvPr/>
+        </p:nvPicPr>
+        <p:blipFill>
+          <a:blip r:embed="rId2"/>
+          <a:stretch>
+            <a:fillRect/>
+          </a:stretch>
+        </p:blipFill>
+        <p:spPr>
+          <a:xfrm>
+            <a:off x="2308413" y="2357719"/>
+            <a:ext cx="7575174" cy="3558036"/>
+          </a:xfrm>
+          <a:prstGeom prst="rect">
+            <a:avLst/>
+          </a:prstGeom>
+        </p:spPr>
+      </p:pic>
     </p:spTree>
     <p:extLst>
       <p:ext uri="{BB962C8B-B14F-4D97-AF65-F5344CB8AC3E}">
@@ -3493,10 +4694,10 @@
       </p:grpSpPr>
       <p:sp>
         <p:nvSpPr>
-          <p:cNvPr id="3" name="슬라이드 번호 개체 틀 2">
-            <a:extLst>
-              <a:ext uri="{FF2B5EF4-FFF2-40B4-BE49-F238E27FC236}">
-                <a16:creationId xmlns:a16="http://schemas.microsoft.com/office/drawing/2014/main" id="{1DC3FD63-C010-3375-4E95-F603268BD98F}"/>
+          <p:cNvPr id="2" name="슬라이드 번호 개체 틀 1">
+            <a:extLst>
+              <a:ext uri="{FF2B5EF4-FFF2-40B4-BE49-F238E27FC236}">
+                <a16:creationId xmlns:a16="http://schemas.microsoft.com/office/drawing/2014/main" id="{367E0703-E976-7C25-B5B1-706A578ADA4E}"/>
               </a:ext>
             </a:extLst>
           </p:cNvPr>
@@ -3523,10 +4724,10 @@
       </p:sp>
       <p:sp>
         <p:nvSpPr>
-          <p:cNvPr id="7" name="제목 6">
-            <a:extLst>
-              <a:ext uri="{FF2B5EF4-FFF2-40B4-BE49-F238E27FC236}">
-                <a16:creationId xmlns:a16="http://schemas.microsoft.com/office/drawing/2014/main" id="{6087A861-1D4F-8B68-0290-8062528B9C82}"/>
+          <p:cNvPr id="3" name="제목 2">
+            <a:extLst>
+              <a:ext uri="{FF2B5EF4-FFF2-40B4-BE49-F238E27FC236}">
+                <a16:creationId xmlns:a16="http://schemas.microsoft.com/office/drawing/2014/main" id="{CEE5BDBC-5725-4128-254A-17EBF2213C80}"/>
               </a:ext>
             </a:extLst>
           </p:cNvPr>
@@ -3542,16 +4743,20 @@
           <a:bodyPr/>
           <a:lstStyle/>
           <a:p>
-            <a:endParaRPr lang="ko-KR" altLang="en-US"/>
-          </a:p>
-        </p:txBody>
-      </p:sp>
-      <p:sp>
-        <p:nvSpPr>
-          <p:cNvPr id="8" name="텍스트 개체 틀 7">
-            <a:extLst>
-              <a:ext uri="{FF2B5EF4-FFF2-40B4-BE49-F238E27FC236}">
-                <a16:creationId xmlns:a16="http://schemas.microsoft.com/office/drawing/2014/main" id="{3F295CEF-0012-D8BD-F3E6-6DB3E85C0ACB}"/>
+            <a:r>
+              <a:rPr lang="en-US" altLang="ko-KR" dirty="0"/>
+              <a:t>Project Motivation</a:t>
+            </a:r>
+            <a:endParaRPr lang="ko-KR" altLang="en-US" dirty="0"/>
+          </a:p>
+        </p:txBody>
+      </p:sp>
+      <p:sp>
+        <p:nvSpPr>
+          <p:cNvPr id="4" name="텍스트 개체 틀 3">
+            <a:extLst>
+              <a:ext uri="{FF2B5EF4-FFF2-40B4-BE49-F238E27FC236}">
+                <a16:creationId xmlns:a16="http://schemas.microsoft.com/office/drawing/2014/main" id="{E4CFA19C-6086-5981-4157-56FC2C8AE799}"/>
               </a:ext>
             </a:extLst>
           </p:cNvPr>
@@ -3562,21 +4767,29 @@
             <p:ph type="body" sz="quarter" idx="15"/>
           </p:nvPr>
         </p:nvSpPr>
-        <p:spPr/>
+        <p:spPr>
+          <a:xfrm>
+            <a:off x="838200" y="856973"/>
+            <a:ext cx="10515598" cy="335413"/>
+          </a:xfrm>
+        </p:spPr>
         <p:txBody>
           <a:bodyPr/>
           <a:lstStyle/>
           <a:p>
-            <a:endParaRPr lang="ko-KR" altLang="en-US"/>
-          </a:p>
-        </p:txBody>
-      </p:sp>
-      <p:sp>
-        <p:nvSpPr>
-          <p:cNvPr id="9" name="내용 개체 틀 8">
-            <a:extLst>
-              <a:ext uri="{FF2B5EF4-FFF2-40B4-BE49-F238E27FC236}">
-                <a16:creationId xmlns:a16="http://schemas.microsoft.com/office/drawing/2014/main" id="{48BC9CEC-294E-53F9-3657-D18BC9FA38B2}"/>
+            <a:r>
+              <a:rPr lang="en-US" altLang="ko-KR" dirty="0"/>
+              <a:t>Degradation Measurement of Robot Arm Position Accuracy</a:t>
+            </a:r>
+          </a:p>
+        </p:txBody>
+      </p:sp>
+      <p:sp>
+        <p:nvSpPr>
+          <p:cNvPr id="5" name="내용 개체 틀 4">
+            <a:extLst>
+              <a:ext uri="{FF2B5EF4-FFF2-40B4-BE49-F238E27FC236}">
+                <a16:creationId xmlns:a16="http://schemas.microsoft.com/office/drawing/2014/main" id="{898A0B4E-3BA2-B59C-5B26-29BD8349CE9D}"/>
               </a:ext>
             </a:extLst>
           </p:cNvPr>
@@ -3589,17 +4802,179 @@
         </p:nvSpPr>
         <p:spPr/>
         <p:txBody>
-          <a:bodyPr/>
+          <a:bodyPr>
+            <a:normAutofit/>
+          </a:bodyPr>
           <a:lstStyle/>
           <a:p>
-            <a:endParaRPr lang="ko-KR" altLang="en-US"/>
-          </a:p>
-        </p:txBody>
-      </p:sp>
+            <a:pPr>
+              <a:lnSpc>
+                <a:spcPct val="150000"/>
+              </a:lnSpc>
+            </a:pPr>
+            <a:r>
+              <a:rPr lang="ko-KR" altLang="en-US" sz="1600" dirty="0"/>
+              <a:t>또한 </a:t>
+            </a:r>
+            <a:r>
+              <a:rPr lang="en-US" altLang="ko-KR" sz="1600" dirty="0"/>
+              <a:t>speed</a:t>
+            </a:r>
+            <a:r>
+              <a:rPr lang="ko-KR" altLang="en-US" sz="1600" dirty="0"/>
+              <a:t>에 비하여 </a:t>
+            </a:r>
+            <a:r>
+              <a:rPr lang="en-US" altLang="ko-KR" sz="1600" dirty="0"/>
+              <a:t>temperature</a:t>
+            </a:r>
+            <a:r>
+              <a:rPr lang="ko-KR" altLang="en-US" sz="1600" dirty="0"/>
+              <a:t>와 </a:t>
+            </a:r>
+            <a:r>
+              <a:rPr lang="en-US" altLang="ko-KR" sz="1600" dirty="0"/>
+              <a:t>payload</a:t>
+            </a:r>
+            <a:r>
+              <a:rPr lang="ko-KR" altLang="en-US" sz="1600" dirty="0"/>
+              <a:t>가 오차에 주는 영향이 작음</a:t>
+            </a:r>
+          </a:p>
+        </p:txBody>
+      </p:sp>
+      <p:grpSp>
+        <p:nvGrpSpPr>
+          <p:cNvPr id="8" name="그룹 7">
+            <a:extLst>
+              <a:ext uri="{FF2B5EF4-FFF2-40B4-BE49-F238E27FC236}">
+                <a16:creationId xmlns:a16="http://schemas.microsoft.com/office/drawing/2014/main" id="{EC07E248-001F-CE92-6B2A-C24192F56017}"/>
+              </a:ext>
+            </a:extLst>
+          </p:cNvPr>
+          <p:cNvGrpSpPr/>
+          <p:nvPr/>
+        </p:nvGrpSpPr>
+        <p:grpSpPr>
+          <a:xfrm>
+            <a:off x="3067047" y="2166862"/>
+            <a:ext cx="6057900" cy="4372050"/>
+            <a:chOff x="2838450" y="1869202"/>
+            <a:chExt cx="6515102" cy="4702017"/>
+          </a:xfrm>
+        </p:grpSpPr>
+        <p:pic>
+          <p:nvPicPr>
+            <p:cNvPr id="6" name="그림 5">
+              <a:extLst>
+                <a:ext uri="{FF2B5EF4-FFF2-40B4-BE49-F238E27FC236}">
+                  <a16:creationId xmlns:a16="http://schemas.microsoft.com/office/drawing/2014/main" id="{AF85261F-99CA-222A-5034-57617018ED11}"/>
+                </a:ext>
+              </a:extLst>
+            </p:cNvPr>
+            <p:cNvPicPr>
+              <a:picLocks noChangeAspect="1"/>
+            </p:cNvPicPr>
+            <p:nvPr/>
+          </p:nvPicPr>
+          <p:blipFill>
+            <a:blip r:embed="rId2"/>
+            <a:stretch>
+              <a:fillRect/>
+            </a:stretch>
+          </p:blipFill>
+          <p:spPr>
+            <a:xfrm>
+              <a:off x="2838450" y="1869202"/>
+              <a:ext cx="6515102" cy="2280285"/>
+            </a:xfrm>
+            <a:prstGeom prst="rect">
+              <a:avLst/>
+            </a:prstGeom>
+          </p:spPr>
+        </p:pic>
+        <p:pic>
+          <p:nvPicPr>
+            <p:cNvPr id="7" name="그림 6">
+              <a:extLst>
+                <a:ext uri="{FF2B5EF4-FFF2-40B4-BE49-F238E27FC236}">
+                  <a16:creationId xmlns:a16="http://schemas.microsoft.com/office/drawing/2014/main" id="{41229909-C69E-C5CA-D87D-EE9D102670FE}"/>
+                </a:ext>
+              </a:extLst>
+            </p:cNvPr>
+            <p:cNvPicPr>
+              <a:picLocks noChangeAspect="1"/>
+            </p:cNvPicPr>
+            <p:nvPr/>
+          </p:nvPicPr>
+          <p:blipFill>
+            <a:blip r:embed="rId3"/>
+            <a:stretch>
+              <a:fillRect/>
+            </a:stretch>
+          </p:blipFill>
+          <p:spPr>
+            <a:xfrm>
+              <a:off x="2838450" y="4290934"/>
+              <a:ext cx="6515100" cy="2280285"/>
+            </a:xfrm>
+            <a:prstGeom prst="rect">
+              <a:avLst/>
+            </a:prstGeom>
+          </p:spPr>
+        </p:pic>
+      </p:grpSp>
+      <p:cxnSp>
+        <p:nvCxnSpPr>
+          <p:cNvPr id="12" name="직선 연결선 11">
+            <a:extLst>
+              <a:ext uri="{FF2B5EF4-FFF2-40B4-BE49-F238E27FC236}">
+                <a16:creationId xmlns:a16="http://schemas.microsoft.com/office/drawing/2014/main" id="{9E826D2D-CD04-C783-FD2B-A9234ABFC58A}"/>
+              </a:ext>
+            </a:extLst>
+          </p:cNvPr>
+          <p:cNvCxnSpPr>
+            <a:cxnSpLocks/>
+          </p:cNvCxnSpPr>
+          <p:nvPr/>
+        </p:nvCxnSpPr>
+        <p:spPr>
+          <a:xfrm>
+            <a:off x="814388" y="1885950"/>
+            <a:ext cx="10563225" cy="0"/>
+          </a:xfrm>
+          <a:prstGeom prst="line">
+            <a:avLst/>
+          </a:prstGeom>
+          <a:ln>
+            <a:solidFill>
+              <a:schemeClr val="bg1">
+                <a:lumMod val="75000"/>
+              </a:schemeClr>
+            </a:solidFill>
+            <a:headEnd type="none" w="med" len="med"/>
+            <a:tailEnd type="none" w="med" len="med"/>
+          </a:ln>
+        </p:spPr>
+        <p:style>
+          <a:lnRef idx="1">
+            <a:schemeClr val="accent1"/>
+          </a:lnRef>
+          <a:fillRef idx="0">
+            <a:schemeClr val="accent1"/>
+          </a:fillRef>
+          <a:effectRef idx="0">
+            <a:schemeClr val="accent1"/>
+          </a:effectRef>
+          <a:fontRef idx="minor">
+            <a:schemeClr val="tx1"/>
+          </a:fontRef>
+        </p:style>
+      </p:cxnSp>
     </p:spTree>
     <p:extLst>
       <p:ext uri="{BB962C8B-B14F-4D97-AF65-F5344CB8AC3E}">
-        <p14:creationId xmlns:p14="http://schemas.microsoft.com/office/powerpoint/2010/main" val="221432059"/>
+        <p14:creationId xmlns:p14="http://schemas.microsoft.com/office/powerpoint/2010/main" val="753967644"/>
       </p:ext>
     </p:extLst>
   </p:cSld>
@@ -3610,6 +4985,636 @@
 </file>
 
 <file path=ppt/slides/slide6.xml><?xml version="1.0" encoding="utf-8"?>
+<p:sld xmlns:a="http://schemas.openxmlformats.org/drawingml/2006/main" xmlns:r="http://schemas.openxmlformats.org/officeDocument/2006/relationships" xmlns:p="http://schemas.openxmlformats.org/presentationml/2006/main">
+  <p:cSld>
+    <p:spTree>
+      <p:nvGrpSpPr>
+        <p:cNvPr id="1" name="">
+          <a:extLst>
+            <a:ext uri="{FF2B5EF4-FFF2-40B4-BE49-F238E27FC236}">
+              <a16:creationId xmlns:a16="http://schemas.microsoft.com/office/drawing/2014/main" id="{FD181113-A286-1B77-4B7F-03E7E269AF10}"/>
+            </a:ext>
+          </a:extLst>
+        </p:cNvPr>
+        <p:cNvGrpSpPr/>
+        <p:nvPr/>
+      </p:nvGrpSpPr>
+      <p:grpSpPr>
+        <a:xfrm>
+          <a:off x="0" y="0"/>
+          <a:ext cx="0" cy="0"/>
+          <a:chOff x="0" y="0"/>
+          <a:chExt cx="0" cy="0"/>
+        </a:xfrm>
+      </p:grpSpPr>
+      <p:sp>
+        <p:nvSpPr>
+          <p:cNvPr id="2" name="슬라이드 번호 개체 틀 1">
+            <a:extLst>
+              <a:ext uri="{FF2B5EF4-FFF2-40B4-BE49-F238E27FC236}">
+                <a16:creationId xmlns:a16="http://schemas.microsoft.com/office/drawing/2014/main" id="{78170569-5E79-F2D7-0AE9-0F8660BEB401}"/>
+              </a:ext>
+            </a:extLst>
+          </p:cNvPr>
+          <p:cNvSpPr>
+            <a:spLocks noGrp="1"/>
+          </p:cNvSpPr>
+          <p:nvPr>
+            <p:ph type="sldNum" sz="quarter" idx="12"/>
+          </p:nvPr>
+        </p:nvSpPr>
+        <p:spPr/>
+        <p:txBody>
+          <a:bodyPr/>
+          <a:lstStyle/>
+          <a:p>
+            <a:fld id="{03396D25-9861-42CC-B82C-BA5CD8B5B13B}" type="slidenum">
+              <a:rPr lang="ko-KR" altLang="en-US" smtClean="0"/>
+              <a:pPr/>
+              <a:t>6</a:t>
+            </a:fld>
+            <a:endParaRPr lang="ko-KR" altLang="en-US"/>
+          </a:p>
+        </p:txBody>
+      </p:sp>
+      <p:sp>
+        <p:nvSpPr>
+          <p:cNvPr id="3" name="제목 2">
+            <a:extLst>
+              <a:ext uri="{FF2B5EF4-FFF2-40B4-BE49-F238E27FC236}">
+                <a16:creationId xmlns:a16="http://schemas.microsoft.com/office/drawing/2014/main" id="{353C8C95-69A7-979B-B6D5-2009994B1245}"/>
+              </a:ext>
+            </a:extLst>
+          </p:cNvPr>
+          <p:cNvSpPr>
+            <a:spLocks noGrp="1"/>
+          </p:cNvSpPr>
+          <p:nvPr>
+            <p:ph type="title"/>
+          </p:nvPr>
+        </p:nvSpPr>
+        <p:spPr/>
+        <p:txBody>
+          <a:bodyPr/>
+          <a:lstStyle/>
+          <a:p>
+            <a:r>
+              <a:rPr lang="en-US" altLang="ko-KR" dirty="0"/>
+              <a:t>Project Motivation</a:t>
+            </a:r>
+            <a:endParaRPr lang="ko-KR" altLang="en-US" dirty="0"/>
+          </a:p>
+        </p:txBody>
+      </p:sp>
+      <p:sp>
+        <p:nvSpPr>
+          <p:cNvPr id="4" name="텍스트 개체 틀 3">
+            <a:extLst>
+              <a:ext uri="{FF2B5EF4-FFF2-40B4-BE49-F238E27FC236}">
+                <a16:creationId xmlns:a16="http://schemas.microsoft.com/office/drawing/2014/main" id="{5044813B-C6B2-B217-4418-4445463BF005}"/>
+              </a:ext>
+            </a:extLst>
+          </p:cNvPr>
+          <p:cNvSpPr>
+            <a:spLocks noGrp="1"/>
+          </p:cNvSpPr>
+          <p:nvPr>
+            <p:ph type="body" sz="quarter" idx="15"/>
+          </p:nvPr>
+        </p:nvSpPr>
+        <p:spPr>
+          <a:xfrm>
+            <a:off x="838200" y="856973"/>
+            <a:ext cx="10515598" cy="335413"/>
+          </a:xfrm>
+        </p:spPr>
+        <p:txBody>
+          <a:bodyPr/>
+          <a:lstStyle/>
+          <a:p>
+            <a:r>
+              <a:rPr lang="en-US" altLang="ko-KR" dirty="0"/>
+              <a:t>Degradation Measurement of Robot Arm Position Accuracy</a:t>
+            </a:r>
+          </a:p>
+        </p:txBody>
+      </p:sp>
+      <p:sp>
+        <p:nvSpPr>
+          <p:cNvPr id="5" name="내용 개체 틀 4">
+            <a:extLst>
+              <a:ext uri="{FF2B5EF4-FFF2-40B4-BE49-F238E27FC236}">
+                <a16:creationId xmlns:a16="http://schemas.microsoft.com/office/drawing/2014/main" id="{59AA5D8F-E2A7-1ED8-6D31-6177FB4990AB}"/>
+              </a:ext>
+            </a:extLst>
+          </p:cNvPr>
+          <p:cNvSpPr>
+            <a:spLocks noGrp="1"/>
+          </p:cNvSpPr>
+          <p:nvPr>
+            <p:ph idx="16"/>
+          </p:nvPr>
+        </p:nvSpPr>
+        <p:spPr/>
+        <p:txBody>
+          <a:bodyPr>
+            <a:normAutofit/>
+          </a:bodyPr>
+          <a:lstStyle/>
+          <a:p>
+            <a:pPr>
+              <a:lnSpc>
+                <a:spcPct val="150000"/>
+              </a:lnSpc>
+            </a:pPr>
+            <a:r>
+              <a:rPr lang="ko-KR" altLang="en-US" sz="1600" dirty="0"/>
+              <a:t>또한 </a:t>
+            </a:r>
+            <a:r>
+              <a:rPr lang="en-US" altLang="ko-KR" sz="1600" dirty="0"/>
+              <a:t>speed</a:t>
+            </a:r>
+            <a:r>
+              <a:rPr lang="ko-KR" altLang="en-US" sz="1600" dirty="0"/>
+              <a:t>에 비하여 </a:t>
+            </a:r>
+            <a:r>
+              <a:rPr lang="en-US" altLang="ko-KR" sz="1600" dirty="0"/>
+              <a:t>temperature</a:t>
+            </a:r>
+            <a:r>
+              <a:rPr lang="ko-KR" altLang="en-US" sz="1600" dirty="0"/>
+              <a:t>와 </a:t>
+            </a:r>
+            <a:r>
+              <a:rPr lang="en-US" altLang="ko-KR" sz="1600" dirty="0"/>
+              <a:t>payload</a:t>
+            </a:r>
+            <a:r>
+              <a:rPr lang="ko-KR" altLang="en-US" sz="1600" dirty="0"/>
+              <a:t>가 오차에 주는 영향이 작음</a:t>
+            </a:r>
+          </a:p>
+        </p:txBody>
+      </p:sp>
+      <p:grpSp>
+        <p:nvGrpSpPr>
+          <p:cNvPr id="12" name="그룹 11">
+            <a:extLst>
+              <a:ext uri="{FF2B5EF4-FFF2-40B4-BE49-F238E27FC236}">
+                <a16:creationId xmlns:a16="http://schemas.microsoft.com/office/drawing/2014/main" id="{4DDD7337-5518-3569-F9E6-ABEF139BF383}"/>
+              </a:ext>
+            </a:extLst>
+          </p:cNvPr>
+          <p:cNvGrpSpPr/>
+          <p:nvPr/>
+        </p:nvGrpSpPr>
+        <p:grpSpPr>
+          <a:xfrm>
+            <a:off x="3067048" y="2166863"/>
+            <a:ext cx="6057898" cy="4372048"/>
+            <a:chOff x="3067047" y="2166863"/>
+            <a:chExt cx="6057898" cy="4372048"/>
+          </a:xfrm>
+        </p:grpSpPr>
+        <p:pic>
+          <p:nvPicPr>
+            <p:cNvPr id="9" name="그림 8">
+              <a:extLst>
+                <a:ext uri="{FF2B5EF4-FFF2-40B4-BE49-F238E27FC236}">
+                  <a16:creationId xmlns:a16="http://schemas.microsoft.com/office/drawing/2014/main" id="{B37F2DFD-3AFC-5656-4D32-68B26101940E}"/>
+                </a:ext>
+              </a:extLst>
+            </p:cNvPr>
+            <p:cNvPicPr>
+              <a:picLocks noChangeAspect="1"/>
+            </p:cNvPicPr>
+            <p:nvPr/>
+          </p:nvPicPr>
+          <p:blipFill>
+            <a:blip r:embed="rId2"/>
+            <a:stretch>
+              <a:fillRect/>
+            </a:stretch>
+          </p:blipFill>
+          <p:spPr>
+            <a:xfrm>
+              <a:off x="3067047" y="2166863"/>
+              <a:ext cx="6057898" cy="2120264"/>
+            </a:xfrm>
+            <a:prstGeom prst="rect">
+              <a:avLst/>
+            </a:prstGeom>
+          </p:spPr>
+        </p:pic>
+        <p:pic>
+          <p:nvPicPr>
+            <p:cNvPr id="11" name="그림 10">
+              <a:extLst>
+                <a:ext uri="{FF2B5EF4-FFF2-40B4-BE49-F238E27FC236}">
+                  <a16:creationId xmlns:a16="http://schemas.microsoft.com/office/drawing/2014/main" id="{C2F40BEB-875B-F6FD-9929-6F12BEAE7B01}"/>
+                </a:ext>
+              </a:extLst>
+            </p:cNvPr>
+            <p:cNvPicPr>
+              <a:picLocks noChangeAspect="1"/>
+            </p:cNvPicPr>
+            <p:nvPr/>
+          </p:nvPicPr>
+          <p:blipFill>
+            <a:blip r:embed="rId3"/>
+            <a:stretch>
+              <a:fillRect/>
+            </a:stretch>
+          </p:blipFill>
+          <p:spPr>
+            <a:xfrm>
+              <a:off x="3067047" y="4418647"/>
+              <a:ext cx="6057898" cy="2120264"/>
+            </a:xfrm>
+            <a:prstGeom prst="rect">
+              <a:avLst/>
+            </a:prstGeom>
+          </p:spPr>
+        </p:pic>
+      </p:grpSp>
+      <p:cxnSp>
+        <p:nvCxnSpPr>
+          <p:cNvPr id="13" name="직선 연결선 12">
+            <a:extLst>
+              <a:ext uri="{FF2B5EF4-FFF2-40B4-BE49-F238E27FC236}">
+                <a16:creationId xmlns:a16="http://schemas.microsoft.com/office/drawing/2014/main" id="{34FC3BFA-7094-270D-39EC-D8F3F4F4017F}"/>
+              </a:ext>
+            </a:extLst>
+          </p:cNvPr>
+          <p:cNvCxnSpPr>
+            <a:cxnSpLocks/>
+          </p:cNvCxnSpPr>
+          <p:nvPr/>
+        </p:nvCxnSpPr>
+        <p:spPr>
+          <a:xfrm>
+            <a:off x="814388" y="1885950"/>
+            <a:ext cx="10563225" cy="0"/>
+          </a:xfrm>
+          <a:prstGeom prst="line">
+            <a:avLst/>
+          </a:prstGeom>
+          <a:ln>
+            <a:solidFill>
+              <a:schemeClr val="bg1">
+                <a:lumMod val="75000"/>
+              </a:schemeClr>
+            </a:solidFill>
+            <a:headEnd type="none" w="med" len="med"/>
+            <a:tailEnd type="none" w="med" len="med"/>
+          </a:ln>
+        </p:spPr>
+        <p:style>
+          <a:lnRef idx="1">
+            <a:schemeClr val="accent1"/>
+          </a:lnRef>
+          <a:fillRef idx="0">
+            <a:schemeClr val="accent1"/>
+          </a:fillRef>
+          <a:effectRef idx="0">
+            <a:schemeClr val="accent1"/>
+          </a:effectRef>
+          <a:fontRef idx="minor">
+            <a:schemeClr val="tx1"/>
+          </a:fontRef>
+        </p:style>
+      </p:cxnSp>
+    </p:spTree>
+    <p:extLst>
+      <p:ext uri="{BB962C8B-B14F-4D97-AF65-F5344CB8AC3E}">
+        <p14:creationId xmlns:p14="http://schemas.microsoft.com/office/powerpoint/2010/main" val="2311112385"/>
+      </p:ext>
+    </p:extLst>
+  </p:cSld>
+  <p:clrMapOvr>
+    <a:masterClrMapping/>
+  </p:clrMapOvr>
+</p:sld>
+</file>
+
+<file path=ppt/slides/slide7.xml><?xml version="1.0" encoding="utf-8"?>
+<p:sld xmlns:a="http://schemas.openxmlformats.org/drawingml/2006/main" xmlns:r="http://schemas.openxmlformats.org/officeDocument/2006/relationships" xmlns:p="http://schemas.openxmlformats.org/presentationml/2006/main">
+  <p:cSld>
+    <p:spTree>
+      <p:nvGrpSpPr>
+        <p:cNvPr id="1" name="">
+          <a:extLst>
+            <a:ext uri="{FF2B5EF4-FFF2-40B4-BE49-F238E27FC236}">
+              <a16:creationId xmlns:a16="http://schemas.microsoft.com/office/drawing/2014/main" id="{BF96E08B-61A7-ABE2-1BBB-96EDFD48DA27}"/>
+            </a:ext>
+          </a:extLst>
+        </p:cNvPr>
+        <p:cNvGrpSpPr/>
+        <p:nvPr/>
+      </p:nvGrpSpPr>
+      <p:grpSpPr>
+        <a:xfrm>
+          <a:off x="0" y="0"/>
+          <a:ext cx="0" cy="0"/>
+          <a:chOff x="0" y="0"/>
+          <a:chExt cx="0" cy="0"/>
+        </a:xfrm>
+      </p:grpSpPr>
+      <p:sp>
+        <p:nvSpPr>
+          <p:cNvPr id="2" name="슬라이드 번호 개체 틀 1">
+            <a:extLst>
+              <a:ext uri="{FF2B5EF4-FFF2-40B4-BE49-F238E27FC236}">
+                <a16:creationId xmlns:a16="http://schemas.microsoft.com/office/drawing/2014/main" id="{4A28D15F-B047-EE9C-CC63-96F6048005AB}"/>
+              </a:ext>
+            </a:extLst>
+          </p:cNvPr>
+          <p:cNvSpPr>
+            <a:spLocks noGrp="1"/>
+          </p:cNvSpPr>
+          <p:nvPr>
+            <p:ph type="sldNum" sz="quarter" idx="12"/>
+          </p:nvPr>
+        </p:nvSpPr>
+        <p:spPr/>
+        <p:txBody>
+          <a:bodyPr/>
+          <a:lstStyle/>
+          <a:p>
+            <a:fld id="{03396D25-9861-42CC-B82C-BA5CD8B5B13B}" type="slidenum">
+              <a:rPr lang="ko-KR" altLang="en-US" smtClean="0"/>
+              <a:pPr/>
+              <a:t>7</a:t>
+            </a:fld>
+            <a:endParaRPr lang="ko-KR" altLang="en-US"/>
+          </a:p>
+        </p:txBody>
+      </p:sp>
+      <p:sp>
+        <p:nvSpPr>
+          <p:cNvPr id="3" name="제목 2">
+            <a:extLst>
+              <a:ext uri="{FF2B5EF4-FFF2-40B4-BE49-F238E27FC236}">
+                <a16:creationId xmlns:a16="http://schemas.microsoft.com/office/drawing/2014/main" id="{65E90664-93FD-A505-D8FD-219DCC4B452D}"/>
+              </a:ext>
+            </a:extLst>
+          </p:cNvPr>
+          <p:cNvSpPr>
+            <a:spLocks noGrp="1"/>
+          </p:cNvSpPr>
+          <p:nvPr>
+            <p:ph type="title"/>
+          </p:nvPr>
+        </p:nvSpPr>
+        <p:spPr/>
+        <p:txBody>
+          <a:bodyPr/>
+          <a:lstStyle/>
+          <a:p>
+            <a:r>
+              <a:rPr lang="en-US" altLang="ko-KR" dirty="0"/>
+              <a:t>Project Motivation</a:t>
+            </a:r>
+            <a:endParaRPr lang="ko-KR" altLang="en-US" dirty="0"/>
+          </a:p>
+        </p:txBody>
+      </p:sp>
+      <p:sp>
+        <p:nvSpPr>
+          <p:cNvPr id="4" name="텍스트 개체 틀 3">
+            <a:extLst>
+              <a:ext uri="{FF2B5EF4-FFF2-40B4-BE49-F238E27FC236}">
+                <a16:creationId xmlns:a16="http://schemas.microsoft.com/office/drawing/2014/main" id="{E38AAAA1-93B5-7DBB-C890-69FF951E3389}"/>
+              </a:ext>
+            </a:extLst>
+          </p:cNvPr>
+          <p:cNvSpPr>
+            <a:spLocks noGrp="1"/>
+          </p:cNvSpPr>
+          <p:nvPr>
+            <p:ph type="body" sz="quarter" idx="15"/>
+          </p:nvPr>
+        </p:nvSpPr>
+        <p:spPr>
+          <a:xfrm>
+            <a:off x="838200" y="856973"/>
+            <a:ext cx="10515598" cy="335413"/>
+          </a:xfrm>
+        </p:spPr>
+        <p:txBody>
+          <a:bodyPr/>
+          <a:lstStyle/>
+          <a:p>
+            <a:r>
+              <a:rPr lang="en-US" altLang="ko-KR" dirty="0"/>
+              <a:t>Degradation Measurement of Robot Arm Position Accuracy</a:t>
+            </a:r>
+          </a:p>
+        </p:txBody>
+      </p:sp>
+      <p:sp>
+        <p:nvSpPr>
+          <p:cNvPr id="5" name="내용 개체 틀 4">
+            <a:extLst>
+              <a:ext uri="{FF2B5EF4-FFF2-40B4-BE49-F238E27FC236}">
+                <a16:creationId xmlns:a16="http://schemas.microsoft.com/office/drawing/2014/main" id="{2D230927-4698-5065-0AB1-620B1762F7AB}"/>
+              </a:ext>
+            </a:extLst>
+          </p:cNvPr>
+          <p:cNvSpPr>
+            <a:spLocks noGrp="1"/>
+          </p:cNvSpPr>
+          <p:nvPr>
+            <p:ph idx="16"/>
+          </p:nvPr>
+        </p:nvSpPr>
+        <p:spPr/>
+        <p:txBody>
+          <a:bodyPr>
+            <a:normAutofit/>
+          </a:bodyPr>
+          <a:lstStyle/>
+          <a:p>
+            <a:pPr>
+              <a:lnSpc>
+                <a:spcPct val="150000"/>
+              </a:lnSpc>
+            </a:pPr>
+            <a:r>
+              <a:rPr lang="ko-KR" altLang="en-US" sz="1600" dirty="0"/>
+              <a:t>또한 </a:t>
+            </a:r>
+            <a:r>
+              <a:rPr lang="en-US" altLang="ko-KR" sz="1600" dirty="0"/>
+              <a:t>speed</a:t>
+            </a:r>
+            <a:r>
+              <a:rPr lang="ko-KR" altLang="en-US" sz="1600" dirty="0"/>
+              <a:t>에 비하여 </a:t>
+            </a:r>
+            <a:r>
+              <a:rPr lang="en-US" altLang="ko-KR" sz="1600" dirty="0"/>
+              <a:t>temperature</a:t>
+            </a:r>
+            <a:r>
+              <a:rPr lang="ko-KR" altLang="en-US" sz="1600" dirty="0"/>
+              <a:t>와 </a:t>
+            </a:r>
+            <a:r>
+              <a:rPr lang="en-US" altLang="ko-KR" sz="1600" dirty="0"/>
+              <a:t>payload</a:t>
+            </a:r>
+            <a:r>
+              <a:rPr lang="ko-KR" altLang="en-US" sz="1600" dirty="0"/>
+              <a:t>가 오차에 주는 영향이 작음</a:t>
+            </a:r>
+          </a:p>
+        </p:txBody>
+      </p:sp>
+      <p:cxnSp>
+        <p:nvCxnSpPr>
+          <p:cNvPr id="10" name="직선 연결선 9">
+            <a:extLst>
+              <a:ext uri="{FF2B5EF4-FFF2-40B4-BE49-F238E27FC236}">
+                <a16:creationId xmlns:a16="http://schemas.microsoft.com/office/drawing/2014/main" id="{1564A029-11B8-7B28-5FFE-CA14BA407CBE}"/>
+              </a:ext>
+            </a:extLst>
+          </p:cNvPr>
+          <p:cNvCxnSpPr>
+            <a:cxnSpLocks/>
+          </p:cNvCxnSpPr>
+          <p:nvPr/>
+        </p:nvCxnSpPr>
+        <p:spPr>
+          <a:xfrm>
+            <a:off x="814388" y="1885950"/>
+            <a:ext cx="10563225" cy="0"/>
+          </a:xfrm>
+          <a:prstGeom prst="line">
+            <a:avLst/>
+          </a:prstGeom>
+          <a:ln>
+            <a:solidFill>
+              <a:schemeClr val="bg1">
+                <a:lumMod val="75000"/>
+              </a:schemeClr>
+            </a:solidFill>
+            <a:headEnd type="none" w="med" len="med"/>
+            <a:tailEnd type="none" w="med" len="med"/>
+          </a:ln>
+        </p:spPr>
+        <p:style>
+          <a:lnRef idx="1">
+            <a:schemeClr val="accent1"/>
+          </a:lnRef>
+          <a:fillRef idx="0">
+            <a:schemeClr val="accent1"/>
+          </a:fillRef>
+          <a:effectRef idx="0">
+            <a:schemeClr val="accent1"/>
+          </a:effectRef>
+          <a:fontRef idx="minor">
+            <a:schemeClr val="tx1"/>
+          </a:fontRef>
+        </p:style>
+      </p:cxnSp>
+      <p:grpSp>
+        <p:nvGrpSpPr>
+          <p:cNvPr id="12" name="그룹 11">
+            <a:extLst>
+              <a:ext uri="{FF2B5EF4-FFF2-40B4-BE49-F238E27FC236}">
+                <a16:creationId xmlns:a16="http://schemas.microsoft.com/office/drawing/2014/main" id="{39725DBC-ECE9-EBDD-E745-3D7EDBAE26EB}"/>
+              </a:ext>
+            </a:extLst>
+          </p:cNvPr>
+          <p:cNvGrpSpPr/>
+          <p:nvPr/>
+        </p:nvGrpSpPr>
+        <p:grpSpPr>
+          <a:xfrm>
+            <a:off x="3067048" y="2166863"/>
+            <a:ext cx="6057898" cy="4372048"/>
+            <a:chOff x="3067047" y="2166863"/>
+            <a:chExt cx="6057898" cy="4372048"/>
+          </a:xfrm>
+        </p:grpSpPr>
+        <p:pic>
+          <p:nvPicPr>
+            <p:cNvPr id="9" name="그림 8">
+              <a:extLst>
+                <a:ext uri="{FF2B5EF4-FFF2-40B4-BE49-F238E27FC236}">
+                  <a16:creationId xmlns:a16="http://schemas.microsoft.com/office/drawing/2014/main" id="{128FF1C9-7B18-EF8D-709C-771D9626ECB2}"/>
+                </a:ext>
+              </a:extLst>
+            </p:cNvPr>
+            <p:cNvPicPr>
+              <a:picLocks noChangeAspect="1"/>
+            </p:cNvPicPr>
+            <p:nvPr/>
+          </p:nvPicPr>
+          <p:blipFill>
+            <a:blip r:embed="rId2"/>
+            <a:stretch>
+              <a:fillRect/>
+            </a:stretch>
+          </p:blipFill>
+          <p:spPr>
+            <a:xfrm>
+              <a:off x="3067047" y="2166863"/>
+              <a:ext cx="6057898" cy="2120264"/>
+            </a:xfrm>
+            <a:prstGeom prst="rect">
+              <a:avLst/>
+            </a:prstGeom>
+          </p:spPr>
+        </p:pic>
+        <p:pic>
+          <p:nvPicPr>
+            <p:cNvPr id="11" name="그림 10">
+              <a:extLst>
+                <a:ext uri="{FF2B5EF4-FFF2-40B4-BE49-F238E27FC236}">
+                  <a16:creationId xmlns:a16="http://schemas.microsoft.com/office/drawing/2014/main" id="{07FE1847-7643-B518-3DAB-EF996295F486}"/>
+                </a:ext>
+              </a:extLst>
+            </p:cNvPr>
+            <p:cNvPicPr>
+              <a:picLocks noChangeAspect="1"/>
+            </p:cNvPicPr>
+            <p:nvPr/>
+          </p:nvPicPr>
+          <p:blipFill>
+            <a:blip r:embed="rId3"/>
+            <a:stretch>
+              <a:fillRect/>
+            </a:stretch>
+          </p:blipFill>
+          <p:spPr>
+            <a:xfrm>
+              <a:off x="3067047" y="4418647"/>
+              <a:ext cx="6057898" cy="2120264"/>
+            </a:xfrm>
+            <a:prstGeom prst="rect">
+              <a:avLst/>
+            </a:prstGeom>
+          </p:spPr>
+        </p:pic>
+      </p:grpSp>
+    </p:spTree>
+    <p:extLst>
+      <p:ext uri="{BB962C8B-B14F-4D97-AF65-F5344CB8AC3E}">
+        <p14:creationId xmlns:p14="http://schemas.microsoft.com/office/powerpoint/2010/main" val="56839720"/>
+      </p:ext>
+    </p:extLst>
+  </p:cSld>
+  <p:clrMapOvr>
+    <a:masterClrMapping/>
+  </p:clrMapOvr>
+</p:sld>
+</file>
+
+<file path=ppt/slides/slide8.xml><?xml version="1.0" encoding="utf-8"?>
 <p:sld xmlns:a="http://schemas.openxmlformats.org/drawingml/2006/main" xmlns:r="http://schemas.openxmlformats.org/officeDocument/2006/relationships" xmlns:p="http://schemas.openxmlformats.org/presentationml/2006/main">
   <p:cSld>
     <p:spTree>
@@ -3628,10 +5633,10 @@
       </p:grpSpPr>
       <p:sp>
         <p:nvSpPr>
-          <p:cNvPr id="3" name="슬라이드 번호 개체 틀 2">
-            <a:extLst>
-              <a:ext uri="{FF2B5EF4-FFF2-40B4-BE49-F238E27FC236}">
-                <a16:creationId xmlns:a16="http://schemas.microsoft.com/office/drawing/2014/main" id="{AFA75D8C-0D28-65A7-EED2-058C8165A7AD}"/>
+          <p:cNvPr id="2" name="슬라이드 번호 개체 틀 1">
+            <a:extLst>
+              <a:ext uri="{FF2B5EF4-FFF2-40B4-BE49-F238E27FC236}">
+                <a16:creationId xmlns:a16="http://schemas.microsoft.com/office/drawing/2014/main" id="{BE65FD9C-37EF-E0CF-4C7E-EB1EC501601A}"/>
               </a:ext>
             </a:extLst>
           </p:cNvPr>
@@ -3650,7 +5655,7 @@
             <a:fld id="{03396D25-9861-42CC-B82C-BA5CD8B5B13B}" type="slidenum">
               <a:rPr lang="ko-KR" altLang="en-US" smtClean="0"/>
               <a:pPr/>
-              <a:t>6</a:t>
+              <a:t>8</a:t>
             </a:fld>
             <a:endParaRPr lang="ko-KR" altLang="en-US"/>
           </a:p>
@@ -3658,10 +5663,10 @@
       </p:sp>
       <p:sp>
         <p:nvSpPr>
-          <p:cNvPr id="7" name="제목 6">
-            <a:extLst>
-              <a:ext uri="{FF2B5EF4-FFF2-40B4-BE49-F238E27FC236}">
-                <a16:creationId xmlns:a16="http://schemas.microsoft.com/office/drawing/2014/main" id="{AA8FD395-2341-E78F-D47B-5C5BDA978AD5}"/>
+          <p:cNvPr id="3" name="제목 2">
+            <a:extLst>
+              <a:ext uri="{FF2B5EF4-FFF2-40B4-BE49-F238E27FC236}">
+                <a16:creationId xmlns:a16="http://schemas.microsoft.com/office/drawing/2014/main" id="{65405053-0E8C-C8B6-FE36-E3E01CEE3AA7}"/>
               </a:ext>
             </a:extLst>
           </p:cNvPr>
@@ -3677,16 +5682,20 @@
           <a:bodyPr/>
           <a:lstStyle/>
           <a:p>
-            <a:endParaRPr lang="ko-KR" altLang="en-US"/>
-          </a:p>
-        </p:txBody>
-      </p:sp>
-      <p:sp>
-        <p:nvSpPr>
-          <p:cNvPr id="8" name="텍스트 개체 틀 7">
-            <a:extLst>
-              <a:ext uri="{FF2B5EF4-FFF2-40B4-BE49-F238E27FC236}">
-                <a16:creationId xmlns:a16="http://schemas.microsoft.com/office/drawing/2014/main" id="{9EBC0C0D-57F0-599C-3F9D-6BD45B5319AF}"/>
+            <a:r>
+              <a:rPr lang="en-US" altLang="ko-KR" dirty="0"/>
+              <a:t>Project Motivation</a:t>
+            </a:r>
+            <a:endParaRPr lang="ko-KR" altLang="en-US" dirty="0"/>
+          </a:p>
+        </p:txBody>
+      </p:sp>
+      <p:sp>
+        <p:nvSpPr>
+          <p:cNvPr id="4" name="텍스트 개체 틀 3">
+            <a:extLst>
+              <a:ext uri="{FF2B5EF4-FFF2-40B4-BE49-F238E27FC236}">
+                <a16:creationId xmlns:a16="http://schemas.microsoft.com/office/drawing/2014/main" id="{BE981C9B-EC67-677F-46AB-7D10509670CD}"/>
               </a:ext>
             </a:extLst>
           </p:cNvPr>
@@ -3702,16 +5711,20 @@
           <a:bodyPr/>
           <a:lstStyle/>
           <a:p>
-            <a:endParaRPr lang="ko-KR" altLang="en-US"/>
-          </a:p>
-        </p:txBody>
-      </p:sp>
-      <p:sp>
-        <p:nvSpPr>
-          <p:cNvPr id="9" name="내용 개체 틀 8">
-            <a:extLst>
-              <a:ext uri="{FF2B5EF4-FFF2-40B4-BE49-F238E27FC236}">
-                <a16:creationId xmlns:a16="http://schemas.microsoft.com/office/drawing/2014/main" id="{855C2126-0744-7A36-44D4-D718541FE284}"/>
+            <a:r>
+              <a:rPr lang="en-US" altLang="ko-KR" dirty="0"/>
+              <a:t>Overview of Project</a:t>
+            </a:r>
+            <a:endParaRPr lang="ko-KR" altLang="en-US" dirty="0"/>
+          </a:p>
+        </p:txBody>
+      </p:sp>
+      <p:sp>
+        <p:nvSpPr>
+          <p:cNvPr id="5" name="내용 개체 틀 4">
+            <a:extLst>
+              <a:ext uri="{FF2B5EF4-FFF2-40B4-BE49-F238E27FC236}">
+                <a16:creationId xmlns:a16="http://schemas.microsoft.com/office/drawing/2014/main" id="{44D2BE08-E1DD-E04B-C291-33F95876B2AB}"/>
               </a:ext>
             </a:extLst>
           </p:cNvPr>
@@ -3724,17 +5737,552 @@
         </p:nvSpPr>
         <p:spPr/>
         <p:txBody>
-          <a:bodyPr/>
+          <a:bodyPr>
+            <a:normAutofit/>
+          </a:bodyPr>
           <a:lstStyle/>
           <a:p>
-            <a:endParaRPr lang="ko-KR" altLang="en-US"/>
-          </a:p>
-        </p:txBody>
-      </p:sp>
+            <a:pPr>
+              <a:lnSpc>
+                <a:spcPct val="150000"/>
+              </a:lnSpc>
+            </a:pPr>
+            <a:r>
+              <a:rPr lang="ko-KR" altLang="en-US" sz="1600" dirty="0"/>
+              <a:t>본 프로젝트는 </a:t>
+            </a:r>
+            <a:r>
+              <a:rPr lang="en-US" altLang="ko-KR" sz="1600" dirty="0"/>
+              <a:t>NIST UR5 </a:t>
+            </a:r>
+            <a:r>
+              <a:rPr lang="ko-KR" altLang="en-US" sz="1600" dirty="0"/>
+              <a:t>운전 데이터에서 계산한 </a:t>
+            </a:r>
+            <a:r>
+              <a:rPr lang="en-US" altLang="ko-KR" sz="1600" b="1" dirty="0">
+                <a:solidFill>
+                  <a:srgbClr val="0000FF"/>
+                </a:solidFill>
+              </a:rPr>
+              <a:t>cartesian tracking error</a:t>
+            </a:r>
+            <a:r>
+              <a:rPr lang="ko-KR" altLang="en-US" sz="1600" b="1" dirty="0">
+                <a:solidFill>
+                  <a:srgbClr val="0000FF"/>
+                </a:solidFill>
+              </a:rPr>
+              <a:t>를 확률분포로 모델링</a:t>
+            </a:r>
+            <a:r>
+              <a:rPr lang="ko-KR" altLang="en-US" sz="1600" dirty="0"/>
+              <a:t>하고</a:t>
+            </a:r>
+            <a:r>
+              <a:rPr lang="en-US" altLang="ko-KR" sz="1600" dirty="0"/>
+              <a:t>, </a:t>
+            </a:r>
+            <a:r>
+              <a:rPr lang="ko-KR" altLang="en-US" sz="1600" dirty="0"/>
+              <a:t>사용자가 지정한 </a:t>
+            </a:r>
+            <a:r>
+              <a:rPr lang="ko-KR" altLang="en-US" sz="1600" b="1" dirty="0">
+                <a:solidFill>
+                  <a:srgbClr val="0000FF"/>
+                </a:solidFill>
+              </a:rPr>
+              <a:t>허용오차와 요구 신뢰도를 만족하는 최대 </a:t>
+            </a:r>
+            <a:r>
+              <a:rPr lang="en-US" altLang="ko-KR" sz="1600" b="1" dirty="0">
+                <a:solidFill>
+                  <a:srgbClr val="0000FF"/>
+                </a:solidFill>
+              </a:rPr>
+              <a:t>speed scale factor</a:t>
+            </a:r>
+            <a:r>
+              <a:rPr lang="ko-KR" altLang="en-US" sz="1600" b="1" dirty="0">
+                <a:solidFill>
+                  <a:srgbClr val="0000FF"/>
+                </a:solidFill>
+              </a:rPr>
+              <a:t>를 추정함</a:t>
+            </a:r>
+            <a:endParaRPr lang="en-US" altLang="ko-KR" sz="1600" b="1" dirty="0">
+              <a:solidFill>
+                <a:srgbClr val="0000FF"/>
+              </a:solidFill>
+            </a:endParaRPr>
+          </a:p>
+          <a:p>
+            <a:pPr>
+              <a:lnSpc>
+                <a:spcPct val="150000"/>
+              </a:lnSpc>
+            </a:pPr>
+            <a:r>
+              <a:rPr lang="ko-KR" altLang="en-US" sz="1600" dirty="0"/>
+              <a:t>로봇 말단부의 </a:t>
+            </a:r>
+            <a:r>
+              <a:rPr lang="en-US" altLang="ko-KR" sz="1600" dirty="0"/>
+              <a:t>tracking error</a:t>
+            </a:r>
+            <a:r>
+              <a:rPr lang="ko-KR" altLang="en-US" sz="1600" dirty="0"/>
+              <a:t>를 물리적 특성에 따라 </a:t>
+            </a:r>
+            <a:r>
+              <a:rPr lang="en-US" altLang="ko-KR" sz="1600" dirty="0"/>
+              <a:t>position error</a:t>
+            </a:r>
+            <a:r>
+              <a:rPr lang="ko-KR" altLang="en-US" sz="1600" dirty="0"/>
+              <a:t>와 </a:t>
+            </a:r>
+            <a:r>
+              <a:rPr lang="en-US" altLang="ko-KR" sz="1600" dirty="0"/>
+              <a:t>orientation error</a:t>
+            </a:r>
+            <a:r>
+              <a:rPr lang="ko-KR" altLang="en-US" sz="1600" dirty="0"/>
+              <a:t>로 나누어 추정함</a:t>
+            </a:r>
+            <a:endParaRPr lang="en-US" altLang="ko-KR" sz="1600" dirty="0"/>
+          </a:p>
+        </p:txBody>
+      </p:sp>
+      <p:grpSp>
+        <p:nvGrpSpPr>
+          <p:cNvPr id="22" name="그룹 21">
+            <a:extLst>
+              <a:ext uri="{FF2B5EF4-FFF2-40B4-BE49-F238E27FC236}">
+                <a16:creationId xmlns:a16="http://schemas.microsoft.com/office/drawing/2014/main" id="{C6D67005-BF92-894C-0268-D02341331A46}"/>
+              </a:ext>
+            </a:extLst>
+          </p:cNvPr>
+          <p:cNvGrpSpPr/>
+          <p:nvPr/>
+        </p:nvGrpSpPr>
+        <p:grpSpPr>
+          <a:xfrm>
+            <a:off x="1615887" y="3067515"/>
+            <a:ext cx="8960220" cy="2320318"/>
+            <a:chOff x="2393576" y="3049586"/>
+            <a:chExt cx="8960220" cy="2320318"/>
+          </a:xfrm>
+        </p:grpSpPr>
+        <p:sp>
+          <p:nvSpPr>
+            <p:cNvPr id="8" name="직사각형 7">
+              <a:extLst>
+                <a:ext uri="{FF2B5EF4-FFF2-40B4-BE49-F238E27FC236}">
+                  <a16:creationId xmlns:a16="http://schemas.microsoft.com/office/drawing/2014/main" id="{2A4D7B02-37F3-7DFA-0950-FF72B05E963C}"/>
+                </a:ext>
+              </a:extLst>
+            </p:cNvPr>
+            <p:cNvSpPr/>
+            <p:nvPr/>
+          </p:nvSpPr>
+          <p:spPr>
+            <a:xfrm>
+              <a:off x="5024438" y="3049586"/>
+              <a:ext cx="3075174" cy="846705"/>
+            </a:xfrm>
+            <a:prstGeom prst="rect">
+              <a:avLst/>
+            </a:prstGeom>
+            <a:solidFill>
+              <a:schemeClr val="bg1"/>
+            </a:solidFill>
+            <a:ln w="19050">
+              <a:solidFill>
+                <a:schemeClr val="tx1"/>
+              </a:solidFill>
+            </a:ln>
+          </p:spPr>
+          <p:txBody>
+            <a:bodyPr wrap="square" lIns="0" tIns="0" rIns="0" bIns="0" rtlCol="0" anchor="ctr" anchorCtr="0">
+              <a:noAutofit/>
+            </a:bodyPr>
+            <a:lstStyle/>
+            <a:p>
+              <a:pPr algn="ctr">
+                <a:lnSpc>
+                  <a:spcPct val="150000"/>
+                </a:lnSpc>
+                <a:spcBef>
+                  <a:spcPts val="600"/>
+                </a:spcBef>
+              </a:pPr>
+              <a:r>
+                <a:rPr lang="en-US" altLang="ko-KR" sz="1400" b="1" dirty="0"/>
+                <a:t>Speed Scale Factor Optimization based on Position Error</a:t>
+              </a:r>
+              <a:endParaRPr lang="ko-KR" altLang="en-US" sz="1400" b="1" dirty="0"/>
+            </a:p>
+          </p:txBody>
+        </p:sp>
+        <p:sp>
+          <p:nvSpPr>
+            <p:cNvPr id="9" name="직사각형 8">
+              <a:extLst>
+                <a:ext uri="{FF2B5EF4-FFF2-40B4-BE49-F238E27FC236}">
+                  <a16:creationId xmlns:a16="http://schemas.microsoft.com/office/drawing/2014/main" id="{8C912A19-E73E-A36F-D4C5-5DD9E6D1DCF3}"/>
+                </a:ext>
+              </a:extLst>
+            </p:cNvPr>
+            <p:cNvSpPr/>
+            <p:nvPr/>
+          </p:nvSpPr>
+          <p:spPr>
+            <a:xfrm>
+              <a:off x="5024438" y="4613275"/>
+              <a:ext cx="3075174" cy="756629"/>
+            </a:xfrm>
+            <a:prstGeom prst="rect">
+              <a:avLst/>
+            </a:prstGeom>
+            <a:solidFill>
+              <a:schemeClr val="bg1"/>
+            </a:solidFill>
+            <a:ln w="19050">
+              <a:solidFill>
+                <a:schemeClr val="tx1"/>
+              </a:solidFill>
+            </a:ln>
+          </p:spPr>
+          <p:txBody>
+            <a:bodyPr wrap="square" lIns="0" tIns="0" rIns="0" bIns="0" rtlCol="0" anchor="ctr" anchorCtr="0">
+              <a:noAutofit/>
+            </a:bodyPr>
+            <a:lstStyle/>
+            <a:p>
+              <a:pPr algn="ctr">
+                <a:lnSpc>
+                  <a:spcPct val="150000"/>
+                </a:lnSpc>
+                <a:spcBef>
+                  <a:spcPts val="600"/>
+                </a:spcBef>
+              </a:pPr>
+              <a:r>
+                <a:rPr lang="en-US" altLang="ko-KR" sz="1400" b="1" dirty="0"/>
+                <a:t>Speed Scale Factor Optimization based on Orientation Error</a:t>
+              </a:r>
+              <a:endParaRPr lang="ko-KR" altLang="en-US" sz="1400" b="1" dirty="0"/>
+            </a:p>
+          </p:txBody>
+        </p:sp>
+        <p:sp>
+          <p:nvSpPr>
+            <p:cNvPr id="10" name="TextBox 9">
+              <a:extLst>
+                <a:ext uri="{FF2B5EF4-FFF2-40B4-BE49-F238E27FC236}">
+                  <a16:creationId xmlns:a16="http://schemas.microsoft.com/office/drawing/2014/main" id="{8A7B5DEA-F2F8-AE30-1027-C833CEE37E67}"/>
+                </a:ext>
+              </a:extLst>
+            </p:cNvPr>
+            <p:cNvSpPr txBox="1"/>
+            <p:nvPr/>
+          </p:nvSpPr>
+          <p:spPr>
+            <a:xfrm>
+              <a:off x="2501154" y="3334439"/>
+              <a:ext cx="1882588" cy="276999"/>
+            </a:xfrm>
+            <a:prstGeom prst="rect">
+              <a:avLst/>
+            </a:prstGeom>
+            <a:noFill/>
+          </p:spPr>
+          <p:txBody>
+            <a:bodyPr wrap="square" rtlCol="0">
+              <a:spAutoFit/>
+            </a:bodyPr>
+            <a:lstStyle/>
+            <a:p>
+              <a:pPr algn="ctr"/>
+              <a:r>
+                <a:rPr lang="en-US" altLang="ko-KR" sz="1200" b="1" dirty="0"/>
+                <a:t>Position tolerance</a:t>
+              </a:r>
+              <a:endParaRPr lang="ko-KR" altLang="en-US" sz="1200" b="1" dirty="0"/>
+            </a:p>
+          </p:txBody>
+        </p:sp>
+        <p:sp>
+          <p:nvSpPr>
+            <p:cNvPr id="11" name="TextBox 10">
+              <a:extLst>
+                <a:ext uri="{FF2B5EF4-FFF2-40B4-BE49-F238E27FC236}">
+                  <a16:creationId xmlns:a16="http://schemas.microsoft.com/office/drawing/2014/main" id="{96125DE9-FF26-6A0B-874B-9C04901A6AB9}"/>
+                </a:ext>
+              </a:extLst>
+            </p:cNvPr>
+            <p:cNvSpPr txBox="1"/>
+            <p:nvPr/>
+          </p:nvSpPr>
+          <p:spPr>
+            <a:xfrm>
+              <a:off x="2393576" y="4853090"/>
+              <a:ext cx="1990166" cy="276999"/>
+            </a:xfrm>
+            <a:prstGeom prst="rect">
+              <a:avLst/>
+            </a:prstGeom>
+            <a:noFill/>
+          </p:spPr>
+          <p:txBody>
+            <a:bodyPr wrap="square" rtlCol="0">
+              <a:spAutoFit/>
+            </a:bodyPr>
+            <a:lstStyle/>
+            <a:p>
+              <a:pPr algn="ctr"/>
+              <a:r>
+                <a:rPr lang="en-US" altLang="ko-KR" sz="1200" b="1" dirty="0"/>
+                <a:t>Orientation tolerance</a:t>
+              </a:r>
+              <a:endParaRPr lang="ko-KR" altLang="en-US" sz="1200" b="1" dirty="0"/>
+            </a:p>
+          </p:txBody>
+        </p:sp>
+        <p:cxnSp>
+          <p:nvCxnSpPr>
+            <p:cNvPr id="13" name="직선 화살표 연결선 12">
+              <a:extLst>
+                <a:ext uri="{FF2B5EF4-FFF2-40B4-BE49-F238E27FC236}">
+                  <a16:creationId xmlns:a16="http://schemas.microsoft.com/office/drawing/2014/main" id="{4AF6E96C-6A2E-4BFC-E67A-3C96DE9D7449}"/>
+                </a:ext>
+              </a:extLst>
+            </p:cNvPr>
+            <p:cNvCxnSpPr>
+              <a:cxnSpLocks/>
+              <a:stCxn id="10" idx="3"/>
+              <a:endCxn id="8" idx="1"/>
+            </p:cNvCxnSpPr>
+            <p:nvPr/>
+          </p:nvCxnSpPr>
+          <p:spPr>
+            <a:xfrm>
+              <a:off x="4383742" y="3472939"/>
+              <a:ext cx="640696" cy="0"/>
+            </a:xfrm>
+            <a:prstGeom prst="straightConnector1">
+              <a:avLst/>
+            </a:prstGeom>
+            <a:ln w="19050">
+              <a:solidFill>
+                <a:schemeClr val="tx1"/>
+              </a:solidFill>
+              <a:headEnd type="none" w="med" len="med"/>
+              <a:tailEnd type="triangle"/>
+            </a:ln>
+          </p:spPr>
+          <p:style>
+            <a:lnRef idx="1">
+              <a:schemeClr val="accent1"/>
+            </a:lnRef>
+            <a:fillRef idx="0">
+              <a:schemeClr val="accent1"/>
+            </a:fillRef>
+            <a:effectRef idx="0">
+              <a:schemeClr val="accent1"/>
+            </a:effectRef>
+            <a:fontRef idx="minor">
+              <a:schemeClr val="tx1"/>
+            </a:fontRef>
+          </p:style>
+        </p:cxnSp>
+        <p:cxnSp>
+          <p:nvCxnSpPr>
+            <p:cNvPr id="15" name="직선 화살표 연결선 14">
+              <a:extLst>
+                <a:ext uri="{FF2B5EF4-FFF2-40B4-BE49-F238E27FC236}">
+                  <a16:creationId xmlns:a16="http://schemas.microsoft.com/office/drawing/2014/main" id="{0DB5278C-37D8-9A81-DBA4-5D904C45248F}"/>
+                </a:ext>
+              </a:extLst>
+            </p:cNvPr>
+            <p:cNvCxnSpPr>
+              <a:cxnSpLocks/>
+              <a:stCxn id="11" idx="3"/>
+              <a:endCxn id="9" idx="1"/>
+            </p:cNvCxnSpPr>
+            <p:nvPr/>
+          </p:nvCxnSpPr>
+          <p:spPr>
+            <a:xfrm>
+              <a:off x="4383742" y="4991590"/>
+              <a:ext cx="640696" cy="0"/>
+            </a:xfrm>
+            <a:prstGeom prst="straightConnector1">
+              <a:avLst/>
+            </a:prstGeom>
+            <a:ln w="19050">
+              <a:solidFill>
+                <a:schemeClr val="tx1"/>
+              </a:solidFill>
+              <a:headEnd type="none" w="med" len="med"/>
+              <a:tailEnd type="triangle"/>
+            </a:ln>
+          </p:spPr>
+          <p:style>
+            <a:lnRef idx="1">
+              <a:schemeClr val="accent1"/>
+            </a:lnRef>
+            <a:fillRef idx="0">
+              <a:schemeClr val="accent1"/>
+            </a:fillRef>
+            <a:effectRef idx="0">
+              <a:schemeClr val="accent1"/>
+            </a:effectRef>
+            <a:fontRef idx="minor">
+              <a:schemeClr val="tx1"/>
+            </a:fontRef>
+          </p:style>
+        </p:cxnSp>
+        <p:sp>
+          <p:nvSpPr>
+            <p:cNvPr id="17" name="TextBox 16">
+              <a:extLst>
+                <a:ext uri="{FF2B5EF4-FFF2-40B4-BE49-F238E27FC236}">
+                  <a16:creationId xmlns:a16="http://schemas.microsoft.com/office/drawing/2014/main" id="{3F0E8C0F-56CE-ED47-A82C-C17542AD9200}"/>
+                </a:ext>
+              </a:extLst>
+            </p:cNvPr>
+            <p:cNvSpPr txBox="1"/>
+            <p:nvPr/>
+          </p:nvSpPr>
+          <p:spPr>
+            <a:xfrm>
+              <a:off x="9471208" y="4075679"/>
+              <a:ext cx="1882588" cy="276999"/>
+            </a:xfrm>
+            <a:prstGeom prst="rect">
+              <a:avLst/>
+            </a:prstGeom>
+            <a:noFill/>
+          </p:spPr>
+          <p:txBody>
+            <a:bodyPr wrap="square" rtlCol="0">
+              <a:spAutoFit/>
+            </a:bodyPr>
+            <a:lstStyle/>
+            <a:p>
+              <a:pPr algn="ctr"/>
+              <a:r>
+                <a:rPr lang="en-US" altLang="ko-KR" sz="1200" b="1" dirty="0"/>
+                <a:t>Speed scale factor</a:t>
+              </a:r>
+              <a:endParaRPr lang="ko-KR" altLang="en-US" sz="1200" b="1" dirty="0"/>
+            </a:p>
+          </p:txBody>
+        </p:sp>
+        <p:cxnSp>
+          <p:nvCxnSpPr>
+            <p:cNvPr id="19" name="연결선: 꺾임 18">
+              <a:extLst>
+                <a:ext uri="{FF2B5EF4-FFF2-40B4-BE49-F238E27FC236}">
+                  <a16:creationId xmlns:a16="http://schemas.microsoft.com/office/drawing/2014/main" id="{49556659-2FAA-EAAC-FCD5-90242ACB477B}"/>
+                </a:ext>
+              </a:extLst>
+            </p:cNvPr>
+            <p:cNvCxnSpPr>
+              <a:cxnSpLocks/>
+              <a:stCxn id="8" idx="3"/>
+              <a:endCxn id="17" idx="1"/>
+            </p:cNvCxnSpPr>
+            <p:nvPr/>
+          </p:nvCxnSpPr>
+          <p:spPr>
+            <a:xfrm>
+              <a:off x="8099612" y="3472939"/>
+              <a:ext cx="1371596" cy="741240"/>
+            </a:xfrm>
+            <a:prstGeom prst="bentConnector3">
+              <a:avLst>
+                <a:gd name="adj1" fmla="val 50000"/>
+              </a:avLst>
+            </a:prstGeom>
+            <a:ln w="19050">
+              <a:solidFill>
+                <a:schemeClr val="tx1"/>
+              </a:solidFill>
+              <a:headEnd type="none" w="med" len="med"/>
+              <a:tailEnd type="triangle"/>
+            </a:ln>
+          </p:spPr>
+          <p:style>
+            <a:lnRef idx="1">
+              <a:schemeClr val="accent1"/>
+            </a:lnRef>
+            <a:fillRef idx="0">
+              <a:schemeClr val="accent1"/>
+            </a:fillRef>
+            <a:effectRef idx="0">
+              <a:schemeClr val="accent1"/>
+            </a:effectRef>
+            <a:fontRef idx="minor">
+              <a:schemeClr val="tx1"/>
+            </a:fontRef>
+          </p:style>
+        </p:cxnSp>
+        <p:cxnSp>
+          <p:nvCxnSpPr>
+            <p:cNvPr id="21" name="연결선: 꺾임 20">
+              <a:extLst>
+                <a:ext uri="{FF2B5EF4-FFF2-40B4-BE49-F238E27FC236}">
+                  <a16:creationId xmlns:a16="http://schemas.microsoft.com/office/drawing/2014/main" id="{6F8B094D-7730-870A-1ED0-24123112AF6D}"/>
+                </a:ext>
+              </a:extLst>
+            </p:cNvPr>
+            <p:cNvCxnSpPr>
+              <a:cxnSpLocks/>
+              <a:stCxn id="9" idx="3"/>
+              <a:endCxn id="17" idx="1"/>
+            </p:cNvCxnSpPr>
+            <p:nvPr/>
+          </p:nvCxnSpPr>
+          <p:spPr>
+            <a:xfrm flipV="1">
+              <a:off x="8099612" y="4214179"/>
+              <a:ext cx="1371596" cy="777411"/>
+            </a:xfrm>
+            <a:prstGeom prst="bentConnector3">
+              <a:avLst/>
+            </a:prstGeom>
+            <a:ln w="19050">
+              <a:solidFill>
+                <a:schemeClr val="tx1"/>
+              </a:solidFill>
+              <a:headEnd type="none" w="med" len="med"/>
+              <a:tailEnd type="none" w="med" len="med"/>
+            </a:ln>
+          </p:spPr>
+          <p:style>
+            <a:lnRef idx="1">
+              <a:schemeClr val="accent1"/>
+            </a:lnRef>
+            <a:fillRef idx="0">
+              <a:schemeClr val="accent1"/>
+            </a:fillRef>
+            <a:effectRef idx="0">
+              <a:schemeClr val="accent1"/>
+            </a:effectRef>
+            <a:fontRef idx="minor">
+              <a:schemeClr val="tx1"/>
+            </a:fontRef>
+          </p:style>
+        </p:cxnSp>
+      </p:grpSp>
     </p:spTree>
     <p:extLst>
       <p:ext uri="{BB962C8B-B14F-4D97-AF65-F5344CB8AC3E}">
-        <p14:creationId xmlns:p14="http://schemas.microsoft.com/office/powerpoint/2010/main" val="1951321855"/>
+        <p14:creationId xmlns:p14="http://schemas.microsoft.com/office/powerpoint/2010/main" val="3157409323"/>
       </p:ext>
     </p:extLst>
   </p:cSld>
@@ -3744,7 +6292,7 @@
 </p:sld>
 </file>
 
-<file path=ppt/slides/slide7.xml><?xml version="1.0" encoding="utf-8"?>
+<file path=ppt/slides/slide9.xml><?xml version="1.0" encoding="utf-8"?>
 <p:sld xmlns:a="http://schemas.openxmlformats.org/drawingml/2006/main" xmlns:r="http://schemas.openxmlformats.org/officeDocument/2006/relationships" xmlns:p="http://schemas.openxmlformats.org/presentationml/2006/main">
   <p:cSld>
     <p:spTree>
@@ -3766,7 +6314,7 @@
           <p:cNvPr id="3" name="슬라이드 번호 개체 틀 2">
             <a:extLst>
               <a:ext uri="{FF2B5EF4-FFF2-40B4-BE49-F238E27FC236}">
-                <a16:creationId xmlns:a16="http://schemas.microsoft.com/office/drawing/2014/main" id="{A74CB442-50A7-3152-58FE-904881FB9441}"/>
+                <a16:creationId xmlns:a16="http://schemas.microsoft.com/office/drawing/2014/main" id="{1DC3FD63-C010-3375-4E95-F603268BD98F}"/>
               </a:ext>
             </a:extLst>
           </p:cNvPr>
@@ -3785,7 +6333,7 @@
             <a:fld id="{03396D25-9861-42CC-B82C-BA5CD8B5B13B}" type="slidenum">
               <a:rPr lang="ko-KR" altLang="en-US" smtClean="0"/>
               <a:pPr/>
-              <a:t>7</a:t>
+              <a:t>9</a:t>
             </a:fld>
             <a:endParaRPr lang="ko-KR" altLang="en-US"/>
           </a:p>
@@ -3796,7 +6344,7 @@
           <p:cNvPr id="7" name="제목 6">
             <a:extLst>
               <a:ext uri="{FF2B5EF4-FFF2-40B4-BE49-F238E27FC236}">
-                <a16:creationId xmlns:a16="http://schemas.microsoft.com/office/drawing/2014/main" id="{5641E316-1029-B502-E52F-2F71A524B0C3}"/>
+                <a16:creationId xmlns:a16="http://schemas.microsoft.com/office/drawing/2014/main" id="{6087A861-1D4F-8B68-0290-8062528B9C82}"/>
               </a:ext>
             </a:extLst>
           </p:cNvPr>
@@ -3814,7 +6362,7 @@
           <a:p>
             <a:r>
               <a:rPr lang="en-US" altLang="ko-KR" dirty="0"/>
-              <a:t>Reference</a:t>
+              <a:t>Results</a:t>
             </a:r>
             <a:endParaRPr lang="ko-KR" altLang="en-US" dirty="0"/>
           </a:p>
@@ -3822,10 +6370,39 @@
       </p:sp>
       <p:sp>
         <p:nvSpPr>
-          <p:cNvPr id="8" name="내용 개체 틀 7">
-            <a:extLst>
-              <a:ext uri="{FF2B5EF4-FFF2-40B4-BE49-F238E27FC236}">
-                <a16:creationId xmlns:a16="http://schemas.microsoft.com/office/drawing/2014/main" id="{B59216C8-A4B4-7196-15A3-AF94A0787DD0}"/>
+          <p:cNvPr id="8" name="텍스트 개체 틀 7">
+            <a:extLst>
+              <a:ext uri="{FF2B5EF4-FFF2-40B4-BE49-F238E27FC236}">
+                <a16:creationId xmlns:a16="http://schemas.microsoft.com/office/drawing/2014/main" id="{3F295CEF-0012-D8BD-F3E6-6DB3E85C0ACB}"/>
+              </a:ext>
+            </a:extLst>
+          </p:cNvPr>
+          <p:cNvSpPr>
+            <a:spLocks noGrp="1"/>
+          </p:cNvSpPr>
+          <p:nvPr>
+            <p:ph type="body" sz="quarter" idx="15"/>
+          </p:nvPr>
+        </p:nvSpPr>
+        <p:spPr/>
+        <p:txBody>
+          <a:bodyPr/>
+          <a:lstStyle/>
+          <a:p>
+            <a:r>
+              <a:rPr lang="en-US" altLang="ko-KR" dirty="0"/>
+              <a:t>Tracking Error Distribution Modeling</a:t>
+            </a:r>
+            <a:endParaRPr lang="ko-KR" altLang="en-US" dirty="0"/>
+          </a:p>
+        </p:txBody>
+      </p:sp>
+      <p:sp>
+        <p:nvSpPr>
+          <p:cNvPr id="9" name="내용 개체 틀 8">
+            <a:extLst>
+              <a:ext uri="{FF2B5EF4-FFF2-40B4-BE49-F238E27FC236}">
+                <a16:creationId xmlns:a16="http://schemas.microsoft.com/office/drawing/2014/main" id="{48BC9CEC-294E-53F9-3657-D18BC9FA38B2}"/>
               </a:ext>
             </a:extLst>
           </p:cNvPr>
@@ -3843,42 +6420,174 @@
           </a:bodyPr>
           <a:lstStyle/>
           <a:p>
-            <a:pPr marL="180975" indent="-180975">
-              <a:buFont typeface="+mj-lt"/>
-              <a:buAutoNum type="arabicPeriod"/>
-            </a:pPr>
-            <a:r>
-              <a:rPr lang="en-US" altLang="ko-KR" sz="1400" dirty="0">
-                <a:latin typeface="Times New Roman" panose="02020603050405020304" pitchFamily="18" charset="0"/>
-                <a:cs typeface="Times New Roman" panose="02020603050405020304" pitchFamily="18" charset="0"/>
-              </a:rPr>
-              <a:t>Qiao, </a:t>
-            </a:r>
-            <a:r>
-              <a:rPr lang="en-US" altLang="ko-KR" sz="1400" dirty="0" err="1">
-                <a:latin typeface="Times New Roman" panose="02020603050405020304" pitchFamily="18" charset="0"/>
-                <a:cs typeface="Times New Roman" panose="02020603050405020304" pitchFamily="18" charset="0"/>
-              </a:rPr>
-              <a:t>Guixiu</a:t>
-            </a:r>
-            <a:r>
-              <a:rPr lang="en-US" altLang="ko-KR" sz="1400" dirty="0">
-                <a:latin typeface="Times New Roman" panose="02020603050405020304" pitchFamily="18" charset="0"/>
-                <a:cs typeface="Times New Roman" panose="02020603050405020304" pitchFamily="18" charset="0"/>
-              </a:rPr>
-              <a:t>, and Brian A. Weiss. "Accuracy degradation analysis for industrial robot systems." International Manufacturing Science and Engineering Conference. Vol. 50749. American Society of Mechanical Engineers, 2017.</a:t>
-            </a:r>
-            <a:endParaRPr lang="ko-KR" altLang="en-US" sz="1400" dirty="0">
-              <a:latin typeface="Times New Roman" panose="02020603050405020304" pitchFamily="18" charset="0"/>
-              <a:cs typeface="Times New Roman" panose="02020603050405020304" pitchFamily="18" charset="0"/>
-            </a:endParaRPr>
-          </a:p>
-        </p:txBody>
-      </p:sp>
+            <a:r>
+              <a:rPr lang="ko-KR" altLang="en-US" sz="1600" dirty="0"/>
+              <a:t>주어진 데이터를 기반으로 </a:t>
+            </a:r>
+            <a:r>
+              <a:rPr lang="en-US" altLang="ko-KR" sz="1600" dirty="0"/>
+              <a:t>Normal, Lognormal, Weibull </a:t>
+            </a:r>
+            <a:r>
+              <a:rPr lang="ko-KR" altLang="en-US" sz="1600" dirty="0"/>
+              <a:t>분포로 가정하고 </a:t>
+            </a:r>
+            <a:r>
+              <a:rPr lang="en-US" altLang="ko-KR" sz="1600" dirty="0"/>
+              <a:t>MLE</a:t>
+            </a:r>
+            <a:r>
+              <a:rPr lang="ko-KR" altLang="en-US" sz="1600" dirty="0"/>
+              <a:t>를 통해 파라미터를 결정함</a:t>
+            </a:r>
+          </a:p>
+        </p:txBody>
+      </p:sp>
+      <p:grpSp>
+        <p:nvGrpSpPr>
+          <p:cNvPr id="10" name="그룹 9">
+            <a:extLst>
+              <a:ext uri="{FF2B5EF4-FFF2-40B4-BE49-F238E27FC236}">
+                <a16:creationId xmlns:a16="http://schemas.microsoft.com/office/drawing/2014/main" id="{BA87ED84-0D30-960C-5C37-DD4847EC5D64}"/>
+              </a:ext>
+            </a:extLst>
+          </p:cNvPr>
+          <p:cNvGrpSpPr/>
+          <p:nvPr/>
+        </p:nvGrpSpPr>
+        <p:grpSpPr>
+          <a:xfrm>
+            <a:off x="2626517" y="2019886"/>
+            <a:ext cx="6938966" cy="4460765"/>
+            <a:chOff x="838199" y="2090141"/>
+            <a:chExt cx="8190379" cy="5265245"/>
+          </a:xfrm>
+        </p:grpSpPr>
+        <p:pic>
+          <p:nvPicPr>
+            <p:cNvPr id="2" name="그림 1">
+              <a:extLst>
+                <a:ext uri="{FF2B5EF4-FFF2-40B4-BE49-F238E27FC236}">
+                  <a16:creationId xmlns:a16="http://schemas.microsoft.com/office/drawing/2014/main" id="{77E45F0D-97B3-2E25-EB70-EFBAB16893DF}"/>
+                </a:ext>
+              </a:extLst>
+            </p:cNvPr>
+            <p:cNvPicPr>
+              <a:picLocks noChangeAspect="1"/>
+            </p:cNvPicPr>
+            <p:nvPr/>
+          </p:nvPicPr>
+          <p:blipFill>
+            <a:blip r:embed="rId2"/>
+            <a:stretch>
+              <a:fillRect/>
+            </a:stretch>
+          </p:blipFill>
+          <p:spPr>
+            <a:xfrm>
+              <a:off x="838199" y="2090141"/>
+              <a:ext cx="4095190" cy="2632622"/>
+            </a:xfrm>
+            <a:prstGeom prst="rect">
+              <a:avLst/>
+            </a:prstGeom>
+          </p:spPr>
+        </p:pic>
+        <p:pic>
+          <p:nvPicPr>
+            <p:cNvPr id="4" name="그림 3">
+              <a:extLst>
+                <a:ext uri="{FF2B5EF4-FFF2-40B4-BE49-F238E27FC236}">
+                  <a16:creationId xmlns:a16="http://schemas.microsoft.com/office/drawing/2014/main" id="{9C6CDC29-A81C-4DDB-B994-FBED4F4D0FA3}"/>
+                </a:ext>
+              </a:extLst>
+            </p:cNvPr>
+            <p:cNvPicPr>
+              <a:picLocks noChangeAspect="1"/>
+            </p:cNvPicPr>
+            <p:nvPr/>
+          </p:nvPicPr>
+          <p:blipFill>
+            <a:blip r:embed="rId3"/>
+            <a:stretch>
+              <a:fillRect/>
+            </a:stretch>
+          </p:blipFill>
+          <p:spPr>
+            <a:xfrm>
+              <a:off x="838199" y="4722763"/>
+              <a:ext cx="4095190" cy="2632623"/>
+            </a:xfrm>
+            <a:prstGeom prst="rect">
+              <a:avLst/>
+            </a:prstGeom>
+          </p:spPr>
+        </p:pic>
+        <p:pic>
+          <p:nvPicPr>
+            <p:cNvPr id="5" name="그림 4">
+              <a:extLst>
+                <a:ext uri="{FF2B5EF4-FFF2-40B4-BE49-F238E27FC236}">
+                  <a16:creationId xmlns:a16="http://schemas.microsoft.com/office/drawing/2014/main" id="{04D3A84F-6FE6-98CC-6A38-59FDE62B1C1A}"/>
+                </a:ext>
+              </a:extLst>
+            </p:cNvPr>
+            <p:cNvPicPr>
+              <a:picLocks noChangeAspect="1"/>
+            </p:cNvPicPr>
+            <p:nvPr/>
+          </p:nvPicPr>
+          <p:blipFill>
+            <a:blip r:embed="rId4"/>
+            <a:stretch>
+              <a:fillRect/>
+            </a:stretch>
+          </p:blipFill>
+          <p:spPr>
+            <a:xfrm>
+              <a:off x="4933389" y="2090141"/>
+              <a:ext cx="4095189" cy="2632622"/>
+            </a:xfrm>
+            <a:prstGeom prst="rect">
+              <a:avLst/>
+            </a:prstGeom>
+          </p:spPr>
+        </p:pic>
+        <p:pic>
+          <p:nvPicPr>
+            <p:cNvPr id="6" name="그림 5">
+              <a:extLst>
+                <a:ext uri="{FF2B5EF4-FFF2-40B4-BE49-F238E27FC236}">
+                  <a16:creationId xmlns:a16="http://schemas.microsoft.com/office/drawing/2014/main" id="{404A095A-8EF8-990C-C011-84F81776C68A}"/>
+                </a:ext>
+              </a:extLst>
+            </p:cNvPr>
+            <p:cNvPicPr>
+              <a:picLocks noChangeAspect="1"/>
+            </p:cNvPicPr>
+            <p:nvPr/>
+          </p:nvPicPr>
+          <p:blipFill>
+            <a:blip r:embed="rId5"/>
+            <a:stretch>
+              <a:fillRect/>
+            </a:stretch>
+          </p:blipFill>
+          <p:spPr>
+            <a:xfrm>
+              <a:off x="4933389" y="4722764"/>
+              <a:ext cx="4095189" cy="2632622"/>
+            </a:xfrm>
+            <a:prstGeom prst="rect">
+              <a:avLst/>
+            </a:prstGeom>
+          </p:spPr>
+        </p:pic>
+      </p:grpSp>
     </p:spTree>
     <p:extLst>
       <p:ext uri="{BB962C8B-B14F-4D97-AF65-F5344CB8AC3E}">
-        <p14:creationId xmlns:p14="http://schemas.microsoft.com/office/powerpoint/2010/main" val="1486698502"/>
+        <p14:creationId xmlns:p14="http://schemas.microsoft.com/office/powerpoint/2010/main" val="221432059"/>
       </p:ext>
     </p:extLst>
   </p:cSld>
